--- a/DLFundamentals/6.CNN/CNN.pptx
+++ b/DLFundamentals/6.CNN/CNN.pptx
@@ -3080,1694 +3080,1697 @@
           <a:chExt cx="0" cy="0"/>
         </a:xfrm>
       </p:grpSpPr>
-      <p:sp>
-        <p:nvSpPr>
-          <p:cNvPr id="4" name="左大括号 3"/>
-          <p:cNvSpPr/>
+      <p:grpSp>
+        <p:nvGrpSpPr>
+          <p:cNvPr id="2" name="组合 1"/>
+          <p:cNvGrpSpPr/>
           <p:nvPr/>
-        </p:nvSpPr>
-        <p:spPr>
+        </p:nvGrpSpPr>
+        <p:grpSpPr>
           <a:xfrm>
-            <a:off x="403860" y="657225"/>
-            <a:ext cx="233680" cy="6128385"/>
+            <a:off x="403860" y="-57413"/>
+            <a:ext cx="6716300" cy="7119303"/>
+            <a:chOff x="636" y="-942"/>
+            <a:chExt cx="12442" cy="13188"/>
           </a:xfrm>
-          <a:prstGeom prst="leftBrace">
-            <a:avLst>
-              <a:gd name="adj1" fmla="val 70108"/>
-              <a:gd name="adj2" fmla="val 50000"/>
-            </a:avLst>
-          </a:prstGeom>
-        </p:spPr>
-        <p:style>
-          <a:lnRef idx="2">
-            <a:schemeClr val="accent1"/>
-          </a:lnRef>
-          <a:fillRef idx="0">
-            <a:srgbClr val="FFFFFF"/>
-          </a:fillRef>
-          <a:effectRef idx="0">
-            <a:srgbClr val="FFFFFF"/>
-          </a:effectRef>
-          <a:fontRef idx="minor">
-            <a:schemeClr val="tx1"/>
-          </a:fontRef>
-        </p:style>
-        <p:txBody>
-          <a:bodyPr rtlCol="0" anchor="ctr"/>
-          <a:p>
-            <a:pPr algn="ctr"/>
-            <a:endParaRPr lang="zh-CN" altLang="en-US"/>
-          </a:p>
-        </p:txBody>
-      </p:sp>
-      <p:sp>
-        <p:nvSpPr>
-          <p:cNvPr id="5" name="矩形 4"/>
-          <p:cNvSpPr/>
-          <p:nvPr/>
-        </p:nvSpPr>
-        <p:spPr>
-          <a:xfrm>
-            <a:off x="1030605" y="657225"/>
-            <a:ext cx="1895475" cy="1895475"/>
-          </a:xfrm>
-          <a:prstGeom prst="rect">
-            <a:avLst/>
-          </a:prstGeom>
-          <a:solidFill>
-            <a:schemeClr val="accent1">
-              <a:lumMod val="60000"/>
-              <a:lumOff val="40000"/>
-            </a:schemeClr>
-          </a:solidFill>
-        </p:spPr>
-        <p:style>
-          <a:lnRef idx="2">
-            <a:schemeClr val="accent1">
-              <a:lumMod val="75000"/>
-            </a:schemeClr>
-          </a:lnRef>
-          <a:fillRef idx="1">
-            <a:schemeClr val="accent1"/>
-          </a:fillRef>
-          <a:effectRef idx="0">
-            <a:srgbClr val="FFFFFF"/>
-          </a:effectRef>
-          <a:fontRef idx="minor">
-            <a:schemeClr val="lt1"/>
-          </a:fontRef>
-        </p:style>
-        <p:txBody>
-          <a:bodyPr rtlCol="0" anchor="ctr"/>
-          <a:p>
-            <a:pPr algn="ctr"/>
-            <a:endParaRPr lang="zh-CN" altLang="en-US"/>
-          </a:p>
-        </p:txBody>
-      </p:sp>
-      <p:sp>
-        <p:nvSpPr>
-          <p:cNvPr id="8" name="左大括号 7"/>
-          <p:cNvSpPr/>
-          <p:nvPr/>
-        </p:nvSpPr>
-        <p:spPr>
-          <a:xfrm>
-            <a:off x="3410585" y="656590"/>
-            <a:ext cx="233680" cy="3642995"/>
-          </a:xfrm>
-          <a:prstGeom prst="leftBrace">
-            <a:avLst>
-              <a:gd name="adj1" fmla="val 70108"/>
-              <a:gd name="adj2" fmla="val 50000"/>
-            </a:avLst>
-          </a:prstGeom>
-          <a:ln>
+        </p:grpSpPr>
+        <p:sp>
+          <p:nvSpPr>
+            <p:cNvPr id="4" name="左大括号 3"/>
+            <p:cNvSpPr/>
+            <p:nvPr/>
+          </p:nvSpPr>
+          <p:spPr>
+            <a:xfrm>
+              <a:off x="636" y="1035"/>
+              <a:ext cx="368" cy="9651"/>
+            </a:xfrm>
+            <a:prstGeom prst="leftBrace">
+              <a:avLst>
+                <a:gd name="adj1" fmla="val 70108"/>
+                <a:gd name="adj2" fmla="val 50000"/>
+              </a:avLst>
+            </a:prstGeom>
+          </p:spPr>
+          <p:style>
+            <a:lnRef idx="2">
+              <a:schemeClr val="accent1"/>
+            </a:lnRef>
+            <a:fillRef idx="0">
+              <a:srgbClr val="FFFFFF"/>
+            </a:fillRef>
+            <a:effectRef idx="0">
+              <a:srgbClr val="FFFFFF"/>
+            </a:effectRef>
+            <a:fontRef idx="minor">
+              <a:schemeClr val="tx1"/>
+            </a:fontRef>
+          </p:style>
+          <p:txBody>
+            <a:bodyPr rtlCol="0" anchor="ctr"/>
+            <a:p>
+              <a:pPr algn="ctr"/>
+              <a:endParaRPr lang="zh-CN" altLang="en-US"/>
+            </a:p>
+          </p:txBody>
+        </p:sp>
+        <p:sp>
+          <p:nvSpPr>
+            <p:cNvPr id="5" name="矩形 4"/>
+            <p:cNvSpPr/>
+            <p:nvPr/>
+          </p:nvSpPr>
+          <p:spPr>
+            <a:xfrm>
+              <a:off x="1623" y="1035"/>
+              <a:ext cx="2985" cy="2985"/>
+            </a:xfrm>
+            <a:prstGeom prst="rect">
+              <a:avLst/>
+            </a:prstGeom>
             <a:solidFill>
+              <a:schemeClr val="accent1">
+                <a:lumMod val="60000"/>
+                <a:lumOff val="40000"/>
+              </a:schemeClr>
+            </a:solidFill>
+          </p:spPr>
+          <p:style>
+            <a:lnRef idx="2">
+              <a:schemeClr val="accent1">
+                <a:lumMod val="75000"/>
+              </a:schemeClr>
+            </a:lnRef>
+            <a:fillRef idx="1">
               <a:schemeClr val="accent1"/>
+            </a:fillRef>
+            <a:effectRef idx="0">
+              <a:srgbClr val="FFFFFF"/>
+            </a:effectRef>
+            <a:fontRef idx="minor">
+              <a:schemeClr val="lt1"/>
+            </a:fontRef>
+          </p:style>
+          <p:txBody>
+            <a:bodyPr rtlCol="0" anchor="ctr"/>
+            <a:p>
+              <a:pPr algn="ctr"/>
+              <a:endParaRPr lang="zh-CN" altLang="en-US"/>
+            </a:p>
+          </p:txBody>
+        </p:sp>
+        <p:sp>
+          <p:nvSpPr>
+            <p:cNvPr id="8" name="左大括号 7"/>
+            <p:cNvSpPr/>
+            <p:nvPr/>
+          </p:nvSpPr>
+          <p:spPr>
+            <a:xfrm>
+              <a:off x="5371" y="1034"/>
+              <a:ext cx="368" cy="5737"/>
+            </a:xfrm>
+            <a:prstGeom prst="leftBrace">
+              <a:avLst>
+                <a:gd name="adj1" fmla="val 70108"/>
+                <a:gd name="adj2" fmla="val 50000"/>
+              </a:avLst>
+            </a:prstGeom>
+            <a:ln>
+              <a:solidFill>
+                <a:schemeClr val="accent1"/>
+              </a:solidFill>
+            </a:ln>
+          </p:spPr>
+          <p:style>
+            <a:lnRef idx="2">
+              <a:schemeClr val="accent1"/>
+            </a:lnRef>
+            <a:fillRef idx="0">
+              <a:srgbClr val="FFFFFF"/>
+            </a:fillRef>
+            <a:effectRef idx="0">
+              <a:srgbClr val="FFFFFF"/>
+            </a:effectRef>
+            <a:fontRef idx="minor">
+              <a:schemeClr val="tx1"/>
+            </a:fontRef>
+          </p:style>
+          <p:txBody>
+            <a:bodyPr rtlCol="0" anchor="ctr"/>
+            <a:p>
+              <a:pPr algn="ctr"/>
+              <a:endParaRPr lang="zh-CN" altLang="en-US"/>
+            </a:p>
+          </p:txBody>
+        </p:sp>
+        <p:sp>
+          <p:nvSpPr>
+            <p:cNvPr id="9" name="矩形 8"/>
+            <p:cNvSpPr/>
+            <p:nvPr/>
+          </p:nvSpPr>
+          <p:spPr>
+            <a:xfrm>
+              <a:off x="5979" y="1035"/>
+              <a:ext cx="1635" cy="1635"/>
+            </a:xfrm>
+            <a:prstGeom prst="rect">
+              <a:avLst/>
+            </a:prstGeom>
+            <a:solidFill>
+              <a:schemeClr val="accent6">
+                <a:lumMod val="60000"/>
+                <a:lumOff val="40000"/>
+              </a:schemeClr>
             </a:solidFill>
-          </a:ln>
-        </p:spPr>
-        <p:style>
-          <a:lnRef idx="2">
-            <a:schemeClr val="accent1"/>
-          </a:lnRef>
-          <a:fillRef idx="0">
-            <a:srgbClr val="FFFFFF"/>
-          </a:fillRef>
-          <a:effectRef idx="0">
-            <a:srgbClr val="FFFFFF"/>
-          </a:effectRef>
-          <a:fontRef idx="minor">
-            <a:schemeClr val="tx1"/>
-          </a:fontRef>
-        </p:style>
-        <p:txBody>
-          <a:bodyPr rtlCol="0" anchor="ctr"/>
-          <a:p>
-            <a:pPr algn="ctr"/>
-            <a:endParaRPr lang="zh-CN" altLang="en-US"/>
-          </a:p>
-        </p:txBody>
-      </p:sp>
-      <p:sp>
-        <p:nvSpPr>
-          <p:cNvPr id="9" name="矩形 8"/>
-          <p:cNvSpPr/>
-          <p:nvPr/>
-        </p:nvSpPr>
-        <p:spPr>
-          <a:xfrm>
-            <a:off x="3796665" y="657225"/>
-            <a:ext cx="1038225" cy="1038225"/>
-          </a:xfrm>
-          <a:prstGeom prst="rect">
-            <a:avLst/>
-          </a:prstGeom>
-          <a:solidFill>
-            <a:schemeClr val="accent6">
-              <a:lumMod val="60000"/>
-              <a:lumOff val="40000"/>
-            </a:schemeClr>
-          </a:solidFill>
-          <a:ln>
+            <a:ln>
+              <a:solidFill>
+                <a:schemeClr val="accent6"/>
+              </a:solidFill>
+            </a:ln>
+          </p:spPr>
+          <p:style>
+            <a:lnRef idx="2">
+              <a:schemeClr val="accent1">
+                <a:lumMod val="75000"/>
+              </a:schemeClr>
+            </a:lnRef>
+            <a:fillRef idx="1">
+              <a:schemeClr val="accent1"/>
+            </a:fillRef>
+            <a:effectRef idx="0">
+              <a:srgbClr val="FFFFFF"/>
+            </a:effectRef>
+            <a:fontRef idx="minor">
+              <a:schemeClr val="lt1"/>
+            </a:fontRef>
+          </p:style>
+          <p:txBody>
+            <a:bodyPr rtlCol="0" anchor="ctr"/>
+            <a:p>
+              <a:pPr algn="ctr"/>
+              <a:endParaRPr lang="zh-CN" altLang="en-US"/>
+            </a:p>
+          </p:txBody>
+        </p:sp>
+        <p:sp>
+          <p:nvSpPr>
+            <p:cNvPr id="10" name="矩形 9"/>
+            <p:cNvSpPr/>
+            <p:nvPr/>
+          </p:nvSpPr>
+          <p:spPr>
+            <a:xfrm>
+              <a:off x="5979" y="3086"/>
+              <a:ext cx="1635" cy="1635"/>
+            </a:xfrm>
+            <a:prstGeom prst="rect">
+              <a:avLst/>
+            </a:prstGeom>
             <a:solidFill>
-              <a:schemeClr val="accent6"/>
+              <a:schemeClr val="accent6">
+                <a:lumMod val="60000"/>
+                <a:lumOff val="40000"/>
+              </a:schemeClr>
             </a:solidFill>
-          </a:ln>
-        </p:spPr>
-        <p:style>
-          <a:lnRef idx="2">
-            <a:schemeClr val="accent1">
-              <a:lumMod val="75000"/>
-            </a:schemeClr>
-          </a:lnRef>
-          <a:fillRef idx="1">
-            <a:schemeClr val="accent1"/>
-          </a:fillRef>
-          <a:effectRef idx="0">
-            <a:srgbClr val="FFFFFF"/>
-          </a:effectRef>
-          <a:fontRef idx="minor">
-            <a:schemeClr val="lt1"/>
-          </a:fontRef>
-        </p:style>
-        <p:txBody>
-          <a:bodyPr rtlCol="0" anchor="ctr"/>
-          <a:p>
-            <a:pPr algn="ctr"/>
-            <a:endParaRPr lang="zh-CN" altLang="en-US"/>
-          </a:p>
-        </p:txBody>
-      </p:sp>
-      <p:sp>
-        <p:nvSpPr>
-          <p:cNvPr id="10" name="矩形 9"/>
-          <p:cNvSpPr/>
-          <p:nvPr/>
-        </p:nvSpPr>
-        <p:spPr>
-          <a:xfrm>
-            <a:off x="3796665" y="1959610"/>
-            <a:ext cx="1038225" cy="1038225"/>
-          </a:xfrm>
-          <a:prstGeom prst="rect">
-            <a:avLst/>
-          </a:prstGeom>
-          <a:solidFill>
-            <a:schemeClr val="accent6">
-              <a:lumMod val="60000"/>
-              <a:lumOff val="40000"/>
-            </a:schemeClr>
-          </a:solidFill>
-          <a:ln>
+            <a:ln>
+              <a:solidFill>
+                <a:schemeClr val="accent6"/>
+              </a:solidFill>
+            </a:ln>
+          </p:spPr>
+          <p:style>
+            <a:lnRef idx="2">
+              <a:schemeClr val="accent1">
+                <a:lumMod val="75000"/>
+              </a:schemeClr>
+            </a:lnRef>
+            <a:fillRef idx="1">
+              <a:schemeClr val="accent1"/>
+            </a:fillRef>
+            <a:effectRef idx="0">
+              <a:srgbClr val="FFFFFF"/>
+            </a:effectRef>
+            <a:fontRef idx="minor">
+              <a:schemeClr val="lt1"/>
+            </a:fontRef>
+          </p:style>
+          <p:txBody>
+            <a:bodyPr rtlCol="0" anchor="ctr"/>
+            <a:p>
+              <a:pPr algn="ctr"/>
+              <a:endParaRPr lang="zh-CN" altLang="en-US"/>
+            </a:p>
+          </p:txBody>
+        </p:sp>
+        <p:sp>
+          <p:nvSpPr>
+            <p:cNvPr id="11" name="矩形 10"/>
+            <p:cNvSpPr/>
+            <p:nvPr/>
+          </p:nvSpPr>
+          <p:spPr>
+            <a:xfrm>
+              <a:off x="5979" y="5137"/>
+              <a:ext cx="1635" cy="1635"/>
+            </a:xfrm>
+            <a:prstGeom prst="rect">
+              <a:avLst/>
+            </a:prstGeom>
             <a:solidFill>
-              <a:schemeClr val="accent6"/>
+              <a:schemeClr val="accent6">
+                <a:lumMod val="60000"/>
+                <a:lumOff val="40000"/>
+              </a:schemeClr>
             </a:solidFill>
-          </a:ln>
-        </p:spPr>
-        <p:style>
-          <a:lnRef idx="2">
-            <a:schemeClr val="accent1">
-              <a:lumMod val="75000"/>
-            </a:schemeClr>
-          </a:lnRef>
-          <a:fillRef idx="1">
-            <a:schemeClr val="accent1"/>
-          </a:fillRef>
-          <a:effectRef idx="0">
-            <a:srgbClr val="FFFFFF"/>
-          </a:effectRef>
-          <a:fontRef idx="minor">
-            <a:schemeClr val="lt1"/>
-          </a:fontRef>
-        </p:style>
-        <p:txBody>
-          <a:bodyPr rtlCol="0" anchor="ctr"/>
-          <a:p>
-            <a:pPr algn="ctr"/>
-            <a:endParaRPr lang="zh-CN" altLang="en-US"/>
-          </a:p>
-        </p:txBody>
-      </p:sp>
-      <p:sp>
-        <p:nvSpPr>
-          <p:cNvPr id="11" name="矩形 10"/>
-          <p:cNvSpPr/>
-          <p:nvPr/>
-        </p:nvSpPr>
-        <p:spPr>
-          <a:xfrm>
-            <a:off x="3796665" y="3261995"/>
-            <a:ext cx="1038225" cy="1038225"/>
-          </a:xfrm>
-          <a:prstGeom prst="rect">
-            <a:avLst/>
-          </a:prstGeom>
-          <a:solidFill>
-            <a:schemeClr val="accent6">
-              <a:lumMod val="60000"/>
-              <a:lumOff val="40000"/>
-            </a:schemeClr>
-          </a:solidFill>
-          <a:ln>
+            <a:ln>
+              <a:solidFill>
+                <a:schemeClr val="accent6"/>
+              </a:solidFill>
+            </a:ln>
+          </p:spPr>
+          <p:style>
+            <a:lnRef idx="2">
+              <a:schemeClr val="accent1">
+                <a:lumMod val="75000"/>
+              </a:schemeClr>
+            </a:lnRef>
+            <a:fillRef idx="1">
+              <a:schemeClr val="accent1"/>
+            </a:fillRef>
+            <a:effectRef idx="0">
+              <a:srgbClr val="FFFFFF"/>
+            </a:effectRef>
+            <a:fontRef idx="minor">
+              <a:schemeClr val="lt1"/>
+            </a:fontRef>
+          </p:style>
+          <p:txBody>
+            <a:bodyPr rtlCol="0" anchor="ctr"/>
+            <a:p>
+              <a:pPr algn="ctr"/>
+              <a:endParaRPr lang="zh-CN" altLang="en-US"/>
+            </a:p>
+          </p:txBody>
+        </p:sp>
+        <p:sp>
+          <p:nvSpPr>
+            <p:cNvPr id="12" name="矩形 11"/>
+            <p:cNvSpPr/>
+            <p:nvPr/>
+          </p:nvSpPr>
+          <p:spPr>
+            <a:xfrm>
+              <a:off x="8132" y="1035"/>
+              <a:ext cx="1635" cy="1635"/>
+            </a:xfrm>
+            <a:prstGeom prst="rect">
+              <a:avLst/>
+            </a:prstGeom>
             <a:solidFill>
-              <a:schemeClr val="accent6"/>
+              <a:schemeClr val="accent6">
+                <a:lumMod val="20000"/>
+                <a:lumOff val="80000"/>
+              </a:schemeClr>
             </a:solidFill>
-          </a:ln>
-        </p:spPr>
-        <p:style>
-          <a:lnRef idx="2">
-            <a:schemeClr val="accent1">
-              <a:lumMod val="75000"/>
-            </a:schemeClr>
-          </a:lnRef>
-          <a:fillRef idx="1">
-            <a:schemeClr val="accent1"/>
-          </a:fillRef>
-          <a:effectRef idx="0">
-            <a:srgbClr val="FFFFFF"/>
-          </a:effectRef>
-          <a:fontRef idx="minor">
-            <a:schemeClr val="lt1"/>
-          </a:fontRef>
-        </p:style>
-        <p:txBody>
-          <a:bodyPr rtlCol="0" anchor="ctr"/>
-          <a:p>
-            <a:pPr algn="ctr"/>
-            <a:endParaRPr lang="zh-CN" altLang="en-US"/>
-          </a:p>
-        </p:txBody>
-      </p:sp>
-      <p:sp>
-        <p:nvSpPr>
-          <p:cNvPr id="12" name="矩形 11"/>
-          <p:cNvSpPr/>
-          <p:nvPr/>
-        </p:nvSpPr>
-        <p:spPr>
-          <a:xfrm>
-            <a:off x="5163820" y="657225"/>
-            <a:ext cx="1038225" cy="1038225"/>
-          </a:xfrm>
-          <a:prstGeom prst="rect">
-            <a:avLst/>
-          </a:prstGeom>
-          <a:solidFill>
-            <a:schemeClr val="accent6">
-              <a:lumMod val="20000"/>
-              <a:lumOff val="80000"/>
-            </a:schemeClr>
-          </a:solidFill>
-          <a:ln>
+            <a:ln>
+              <a:solidFill>
+                <a:schemeClr val="accent6"/>
+              </a:solidFill>
+            </a:ln>
+          </p:spPr>
+          <p:style>
+            <a:lnRef idx="2">
+              <a:schemeClr val="accent1">
+                <a:lumMod val="75000"/>
+              </a:schemeClr>
+            </a:lnRef>
+            <a:fillRef idx="1">
+              <a:schemeClr val="accent1"/>
+            </a:fillRef>
+            <a:effectRef idx="0">
+              <a:srgbClr val="FFFFFF"/>
+            </a:effectRef>
+            <a:fontRef idx="minor">
+              <a:schemeClr val="lt1"/>
+            </a:fontRef>
+          </p:style>
+          <p:txBody>
+            <a:bodyPr rtlCol="0" anchor="ctr"/>
+            <a:p>
+              <a:pPr algn="ctr"/>
+              <a:endParaRPr lang="zh-CN" altLang="en-US"/>
+            </a:p>
+          </p:txBody>
+        </p:sp>
+        <p:sp>
+          <p:nvSpPr>
+            <p:cNvPr id="13" name="矩形 12"/>
+            <p:cNvSpPr/>
+            <p:nvPr/>
+          </p:nvSpPr>
+          <p:spPr>
+            <a:xfrm>
+              <a:off x="8132" y="3086"/>
+              <a:ext cx="1635" cy="1635"/>
+            </a:xfrm>
+            <a:prstGeom prst="rect">
+              <a:avLst/>
+            </a:prstGeom>
             <a:solidFill>
-              <a:schemeClr val="accent6"/>
+              <a:schemeClr val="accent6">
+                <a:lumMod val="20000"/>
+                <a:lumOff val="80000"/>
+              </a:schemeClr>
             </a:solidFill>
-          </a:ln>
-        </p:spPr>
-        <p:style>
-          <a:lnRef idx="2">
-            <a:schemeClr val="accent1">
-              <a:lumMod val="75000"/>
-            </a:schemeClr>
-          </a:lnRef>
-          <a:fillRef idx="1">
-            <a:schemeClr val="accent1"/>
-          </a:fillRef>
-          <a:effectRef idx="0">
-            <a:srgbClr val="FFFFFF"/>
-          </a:effectRef>
-          <a:fontRef idx="minor">
-            <a:schemeClr val="lt1"/>
-          </a:fontRef>
-        </p:style>
-        <p:txBody>
-          <a:bodyPr rtlCol="0" anchor="ctr"/>
-          <a:p>
-            <a:pPr algn="ctr"/>
-            <a:endParaRPr lang="zh-CN" altLang="en-US"/>
-          </a:p>
-        </p:txBody>
-      </p:sp>
-      <p:sp>
-        <p:nvSpPr>
-          <p:cNvPr id="13" name="矩形 12"/>
-          <p:cNvSpPr/>
-          <p:nvPr/>
-        </p:nvSpPr>
-        <p:spPr>
-          <a:xfrm>
-            <a:off x="5163820" y="1959610"/>
-            <a:ext cx="1038225" cy="1038225"/>
-          </a:xfrm>
-          <a:prstGeom prst="rect">
-            <a:avLst/>
-          </a:prstGeom>
-          <a:solidFill>
-            <a:schemeClr val="accent6">
-              <a:lumMod val="20000"/>
-              <a:lumOff val="80000"/>
-            </a:schemeClr>
-          </a:solidFill>
-          <a:ln>
+            <a:ln>
+              <a:solidFill>
+                <a:schemeClr val="accent6"/>
+              </a:solidFill>
+            </a:ln>
+          </p:spPr>
+          <p:style>
+            <a:lnRef idx="2">
+              <a:schemeClr val="accent1">
+                <a:lumMod val="75000"/>
+              </a:schemeClr>
+            </a:lnRef>
+            <a:fillRef idx="1">
+              <a:schemeClr val="accent1"/>
+            </a:fillRef>
+            <a:effectRef idx="0">
+              <a:srgbClr val="FFFFFF"/>
+            </a:effectRef>
+            <a:fontRef idx="minor">
+              <a:schemeClr val="lt1"/>
+            </a:fontRef>
+          </p:style>
+          <p:txBody>
+            <a:bodyPr rtlCol="0" anchor="ctr"/>
+            <a:p>
+              <a:pPr algn="ctr"/>
+              <a:endParaRPr lang="zh-CN" altLang="en-US"/>
+            </a:p>
+          </p:txBody>
+        </p:sp>
+        <p:sp>
+          <p:nvSpPr>
+            <p:cNvPr id="14" name="矩形 13"/>
+            <p:cNvSpPr/>
+            <p:nvPr/>
+          </p:nvSpPr>
+          <p:spPr>
+            <a:xfrm>
+              <a:off x="8132" y="5137"/>
+              <a:ext cx="1635" cy="1635"/>
+            </a:xfrm>
+            <a:prstGeom prst="rect">
+              <a:avLst/>
+            </a:prstGeom>
             <a:solidFill>
-              <a:schemeClr val="accent6"/>
+              <a:schemeClr val="accent6">
+                <a:lumMod val="20000"/>
+                <a:lumOff val="80000"/>
+              </a:schemeClr>
             </a:solidFill>
-          </a:ln>
-        </p:spPr>
-        <p:style>
-          <a:lnRef idx="2">
-            <a:schemeClr val="accent1">
-              <a:lumMod val="75000"/>
-            </a:schemeClr>
-          </a:lnRef>
-          <a:fillRef idx="1">
-            <a:schemeClr val="accent1"/>
-          </a:fillRef>
-          <a:effectRef idx="0">
-            <a:srgbClr val="FFFFFF"/>
-          </a:effectRef>
-          <a:fontRef idx="minor">
-            <a:schemeClr val="lt1"/>
-          </a:fontRef>
-        </p:style>
-        <p:txBody>
-          <a:bodyPr rtlCol="0" anchor="ctr"/>
-          <a:p>
-            <a:pPr algn="ctr"/>
-            <a:endParaRPr lang="zh-CN" altLang="en-US"/>
-          </a:p>
-        </p:txBody>
-      </p:sp>
-      <p:sp>
-        <p:nvSpPr>
-          <p:cNvPr id="14" name="矩形 13"/>
-          <p:cNvSpPr/>
-          <p:nvPr/>
-        </p:nvSpPr>
-        <p:spPr>
-          <a:xfrm>
-            <a:off x="5163820" y="3261995"/>
-            <a:ext cx="1038225" cy="1038225"/>
-          </a:xfrm>
-          <a:prstGeom prst="rect">
-            <a:avLst/>
-          </a:prstGeom>
-          <a:solidFill>
-            <a:schemeClr val="accent6">
-              <a:lumMod val="20000"/>
-              <a:lumOff val="80000"/>
-            </a:schemeClr>
-          </a:solidFill>
-          <a:ln>
-            <a:solidFill>
-              <a:schemeClr val="accent6"/>
-            </a:solidFill>
-          </a:ln>
-        </p:spPr>
-        <p:style>
-          <a:lnRef idx="2">
-            <a:schemeClr val="accent1">
-              <a:lumMod val="75000"/>
-            </a:schemeClr>
-          </a:lnRef>
-          <a:fillRef idx="1">
-            <a:schemeClr val="accent1"/>
-          </a:fillRef>
-          <a:effectRef idx="0">
-            <a:srgbClr val="FFFFFF"/>
-          </a:effectRef>
-          <a:fontRef idx="minor">
-            <a:schemeClr val="lt1"/>
-          </a:fontRef>
-        </p:style>
-        <p:txBody>
-          <a:bodyPr rtlCol="0" anchor="ctr"/>
-          <a:p>
-            <a:pPr algn="ctr"/>
-            <a:endParaRPr lang="zh-CN" altLang="en-US"/>
-          </a:p>
-        </p:txBody>
-      </p:sp>
-      <p:sp>
-        <p:nvSpPr>
-          <p:cNvPr id="15" name="矩形 14"/>
-          <p:cNvSpPr/>
-          <p:nvPr/>
-        </p:nvSpPr>
-        <p:spPr>
-          <a:xfrm>
-            <a:off x="7266305" y="657225"/>
-            <a:ext cx="1038225" cy="1038225"/>
-          </a:xfrm>
-          <a:prstGeom prst="rect">
-            <a:avLst/>
-          </a:prstGeom>
-          <a:solidFill>
-            <a:schemeClr val="accent5">
-              <a:lumMod val="20000"/>
-              <a:lumOff val="80000"/>
-            </a:schemeClr>
-          </a:solidFill>
-          <a:ln>
+            <a:ln>
+              <a:solidFill>
+                <a:schemeClr val="accent6"/>
+              </a:solidFill>
+            </a:ln>
+          </p:spPr>
+          <p:style>
+            <a:lnRef idx="2">
+              <a:schemeClr val="accent1">
+                <a:lumMod val="75000"/>
+              </a:schemeClr>
+            </a:lnRef>
+            <a:fillRef idx="1">
+              <a:schemeClr val="accent1"/>
+            </a:fillRef>
+            <a:effectRef idx="0">
+              <a:srgbClr val="FFFFFF"/>
+            </a:effectRef>
+            <a:fontRef idx="minor">
+              <a:schemeClr val="lt1"/>
+            </a:fontRef>
+          </p:style>
+          <p:txBody>
+            <a:bodyPr rtlCol="0" anchor="ctr"/>
+            <a:p>
+              <a:pPr algn="ctr"/>
+              <a:endParaRPr lang="zh-CN" altLang="en-US"/>
+            </a:p>
+          </p:txBody>
+        </p:sp>
+        <p:sp>
+          <p:nvSpPr>
+            <p:cNvPr id="15" name="矩形 14"/>
+            <p:cNvSpPr/>
+            <p:nvPr/>
+          </p:nvSpPr>
+          <p:spPr>
+            <a:xfrm>
+              <a:off x="11443" y="1035"/>
+              <a:ext cx="1635" cy="1635"/>
+            </a:xfrm>
+            <a:prstGeom prst="rect">
+              <a:avLst/>
+            </a:prstGeom>
             <a:solidFill>
               <a:schemeClr val="accent5">
+                <a:lumMod val="20000"/>
+                <a:lumOff val="80000"/>
+              </a:schemeClr>
+            </a:solidFill>
+            <a:ln>
+              <a:solidFill>
+                <a:schemeClr val="accent5">
+                  <a:lumMod val="75000"/>
+                </a:schemeClr>
+              </a:solidFill>
+            </a:ln>
+          </p:spPr>
+          <p:style>
+            <a:lnRef idx="2">
+              <a:schemeClr val="accent1">
                 <a:lumMod val="75000"/>
               </a:schemeClr>
-            </a:solidFill>
-          </a:ln>
-        </p:spPr>
-        <p:style>
-          <a:lnRef idx="2">
-            <a:schemeClr val="accent1">
-              <a:lumMod val="75000"/>
-            </a:schemeClr>
-          </a:lnRef>
-          <a:fillRef idx="1">
-            <a:schemeClr val="accent1"/>
-          </a:fillRef>
-          <a:effectRef idx="0">
-            <a:srgbClr val="FFFFFF"/>
-          </a:effectRef>
-          <a:fontRef idx="minor">
-            <a:schemeClr val="lt1"/>
-          </a:fontRef>
-        </p:style>
-        <p:txBody>
-          <a:bodyPr rtlCol="0" anchor="ctr"/>
-          <a:p>
-            <a:pPr algn="ctr"/>
-            <a:endParaRPr lang="zh-CN" altLang="en-US"/>
-          </a:p>
-        </p:txBody>
-      </p:sp>
-      <p:sp>
-        <p:nvSpPr>
-          <p:cNvPr id="16" name="矩形 15"/>
-          <p:cNvSpPr/>
-          <p:nvPr/>
-        </p:nvSpPr>
-        <p:spPr>
-          <a:xfrm>
-            <a:off x="7266305" y="1959610"/>
-            <a:ext cx="1038225" cy="1038225"/>
-          </a:xfrm>
-          <a:prstGeom prst="rect">
-            <a:avLst/>
-          </a:prstGeom>
-          <a:solidFill>
-            <a:schemeClr val="accent5">
-              <a:lumMod val="20000"/>
-              <a:lumOff val="80000"/>
-            </a:schemeClr>
-          </a:solidFill>
-          <a:ln>
+            </a:lnRef>
+            <a:fillRef idx="1">
+              <a:schemeClr val="accent1"/>
+            </a:fillRef>
+            <a:effectRef idx="0">
+              <a:srgbClr val="FFFFFF"/>
+            </a:effectRef>
+            <a:fontRef idx="minor">
+              <a:schemeClr val="lt1"/>
+            </a:fontRef>
+          </p:style>
+          <p:txBody>
+            <a:bodyPr rtlCol="0" anchor="ctr"/>
+            <a:p>
+              <a:pPr algn="ctr"/>
+              <a:endParaRPr lang="zh-CN" altLang="en-US"/>
+            </a:p>
+          </p:txBody>
+        </p:sp>
+        <p:sp>
+          <p:nvSpPr>
+            <p:cNvPr id="16" name="矩形 15"/>
+            <p:cNvSpPr/>
+            <p:nvPr/>
+          </p:nvSpPr>
+          <p:spPr>
+            <a:xfrm>
+              <a:off x="11443" y="3086"/>
+              <a:ext cx="1635" cy="1635"/>
+            </a:xfrm>
+            <a:prstGeom prst="rect">
+              <a:avLst/>
+            </a:prstGeom>
             <a:solidFill>
               <a:schemeClr val="accent5">
+                <a:lumMod val="20000"/>
+                <a:lumOff val="80000"/>
+              </a:schemeClr>
+            </a:solidFill>
+            <a:ln>
+              <a:solidFill>
+                <a:schemeClr val="accent5">
+                  <a:lumMod val="75000"/>
+                </a:schemeClr>
+              </a:solidFill>
+            </a:ln>
+          </p:spPr>
+          <p:style>
+            <a:lnRef idx="2">
+              <a:schemeClr val="accent1">
                 <a:lumMod val="75000"/>
               </a:schemeClr>
+            </a:lnRef>
+            <a:fillRef idx="1">
+              <a:schemeClr val="accent1"/>
+            </a:fillRef>
+            <a:effectRef idx="0">
+              <a:srgbClr val="FFFFFF"/>
+            </a:effectRef>
+            <a:fontRef idx="minor">
+              <a:schemeClr val="lt1"/>
+            </a:fontRef>
+          </p:style>
+          <p:txBody>
+            <a:bodyPr rtlCol="0" anchor="ctr"/>
+            <a:p>
+              <a:pPr algn="ctr"/>
+              <a:endParaRPr lang="zh-CN" altLang="en-US"/>
+            </a:p>
+          </p:txBody>
+        </p:sp>
+        <p:sp>
+          <p:nvSpPr>
+            <p:cNvPr id="17" name="左大括号 16"/>
+            <p:cNvSpPr/>
+            <p:nvPr/>
+          </p:nvSpPr>
+          <p:spPr>
+            <a:xfrm rot="5400000">
+              <a:off x="7689" y="-1643"/>
+              <a:ext cx="368" cy="3788"/>
+            </a:xfrm>
+            <a:prstGeom prst="leftBrace">
+              <a:avLst>
+                <a:gd name="adj1" fmla="val 70108"/>
+                <a:gd name="adj2" fmla="val 50000"/>
+              </a:avLst>
+            </a:prstGeom>
+            <a:ln>
+              <a:solidFill>
+                <a:schemeClr val="accent5"/>
+              </a:solidFill>
+            </a:ln>
+          </p:spPr>
+          <p:style>
+            <a:lnRef idx="2">
+              <a:schemeClr val="accent1"/>
+            </a:lnRef>
+            <a:fillRef idx="0">
+              <a:srgbClr val="FFFFFF"/>
+            </a:fillRef>
+            <a:effectRef idx="0">
+              <a:srgbClr val="FFFFFF"/>
+            </a:effectRef>
+            <a:fontRef idx="minor">
+              <a:schemeClr val="tx1"/>
+            </a:fontRef>
+          </p:style>
+          <p:txBody>
+            <a:bodyPr rtlCol="0" anchor="ctr"/>
+            <a:p>
+              <a:pPr algn="ctr"/>
+              <a:endParaRPr lang="zh-CN" altLang="en-US"/>
+            </a:p>
+          </p:txBody>
+        </p:sp>
+        <mc:AlternateContent xmlns:mc="http://schemas.openxmlformats.org/markup-compatibility/2006">
+          <mc:Choice xmlns:a14="http://schemas.microsoft.com/office/drawing/2010/main" Requires="a14">
+            <p:sp>
+              <p:nvSpPr>
+                <p:cNvPr id="18" name="矩形 17"/>
+                <p:cNvSpPr/>
+                <p:nvPr/>
+              </p:nvSpPr>
+              <p:spPr>
+                <a:xfrm>
+                  <a:off x="5979" y="7004"/>
+                  <a:ext cx="537" cy="537"/>
+                </a:xfrm>
+                <a:prstGeom prst="rect">
+                  <a:avLst/>
+                </a:prstGeom>
+                <a:solidFill>
+                  <a:schemeClr val="accent6">
+                    <a:lumMod val="60000"/>
+                    <a:lumOff val="40000"/>
+                  </a:schemeClr>
+                </a:solidFill>
+                <a:ln>
+                  <a:solidFill>
+                    <a:schemeClr val="accent6"/>
+                  </a:solidFill>
+                </a:ln>
+              </p:spPr>
+              <p:style>
+                <a:lnRef idx="2">
+                  <a:schemeClr val="accent1">
+                    <a:lumMod val="75000"/>
+                  </a:schemeClr>
+                </a:lnRef>
+                <a:fillRef idx="1">
+                  <a:schemeClr val="accent1"/>
+                </a:fillRef>
+                <a:effectRef idx="0">
+                  <a:srgbClr val="FFFFFF"/>
+                </a:effectRef>
+                <a:fontRef idx="minor">
+                  <a:schemeClr val="lt1"/>
+                </a:fontRef>
+              </p:style>
+              <p:txBody>
+                <a:bodyPr rtlCol="0" anchor="ctr"/>
+                <a:p>
+                  <a:pPr algn="ctr"/>
+                  <a14:m>
+                    <m:oMathPara xmlns:m="http://schemas.openxmlformats.org/officeDocument/2006/math">
+                      <m:oMathParaPr>
+                        <m:jc m:val="centerGroup"/>
+                      </m:oMathParaPr>
+                      <m:oMath xmlns:m="http://schemas.openxmlformats.org/officeDocument/2006/math">
+                        <m:sSub>
+                          <m:sSubPr>
+                            <m:ctrlPr>
+                              <a:rPr lang="en-US" altLang="zh-CN" sz="1400" i="1">
+                                <a:solidFill>
+                                  <a:schemeClr val="tx1"/>
+                                </a:solidFill>
+                                <a:latin typeface="Cambria Math" panose="02040503050406030204" charset="0"/>
+                                <a:cs typeface="Cambria Math" panose="02040503050406030204" charset="0"/>
+                              </a:rPr>
+                            </m:ctrlPr>
+                          </m:sSubPr>
+                          <m:e>
+                            <m:r>
+                              <a:rPr lang="en-US" altLang="zh-CN" sz="1400" i="1">
+                                <a:solidFill>
+                                  <a:schemeClr val="tx1"/>
+                                </a:solidFill>
+                                <a:latin typeface="Cambria Math" panose="02040503050406030204" charset="0"/>
+                                <a:cs typeface="Cambria Math" panose="02040503050406030204" charset="0"/>
+                              </a:rPr>
+                              <m:t>𝑤</m:t>
+                            </m:r>
+                          </m:e>
+                          <m:sub>
+                            <m:r>
+                              <a:rPr lang="en-US" altLang="zh-CN" sz="1400" i="1">
+                                <a:solidFill>
+                                  <a:schemeClr val="tx1"/>
+                                </a:solidFill>
+                                <a:latin typeface="Cambria Math" panose="02040503050406030204" charset="0"/>
+                                <a:cs typeface="Cambria Math" panose="02040503050406030204" charset="0"/>
+                              </a:rPr>
+                              <m:t>1</m:t>
+                            </m:r>
+                          </m:sub>
+                        </m:sSub>
+                      </m:oMath>
+                    </m:oMathPara>
+                  </a14:m>
+                  <a:endParaRPr lang="en-US" altLang="zh-CN" sz="1400" i="1">
+                    <a:solidFill>
+                      <a:schemeClr val="tx1"/>
+                    </a:solidFill>
+                    <a:latin typeface="Cambria Math" panose="02040503050406030204" charset="0"/>
+                    <a:cs typeface="Cambria Math" panose="02040503050406030204" charset="0"/>
+                  </a:endParaRPr>
+                </a:p>
+              </p:txBody>
+            </p:sp>
+          </mc:Choice>
+          <mc:Fallback>
+            <p:sp>
+              <p:nvSpPr>
+                <p:cNvPr id="18" name="矩形 17"/>
+                <p:cNvSpPr>
+                  <a:spLocks noRot="1" noChangeAspect="1" noMove="1" noResize="1" noEditPoints="1" noAdjustHandles="1" noChangeArrowheads="1" noChangeShapeType="1" noTextEdit="1"/>
+                </p:cNvSpPr>
+                <p:nvPr/>
+              </p:nvSpPr>
+              <p:spPr>
+                <a:xfrm>
+                  <a:off x="5979" y="7004"/>
+                  <a:ext cx="537" cy="537"/>
+                </a:xfrm>
+                <a:prstGeom prst="rect">
+                  <a:avLst/>
+                </a:prstGeom>
+                <a:blipFill rotWithShape="1">
+                  <a:blip r:embed="rId1"/>
+                </a:blipFill>
+                <a:ln>
+                  <a:solidFill>
+                    <a:schemeClr val="accent6"/>
+                  </a:solidFill>
+                </a:ln>
+              </p:spPr>
+              <p:style>
+                <a:lnRef idx="2">
+                  <a:schemeClr val="accent1">
+                    <a:lumMod val="75000"/>
+                  </a:schemeClr>
+                </a:lnRef>
+                <a:fillRef idx="1">
+                  <a:schemeClr val="accent1"/>
+                </a:fillRef>
+                <a:effectRef idx="0">
+                  <a:srgbClr val="FFFFFF"/>
+                </a:effectRef>
+                <a:fontRef idx="minor">
+                  <a:schemeClr val="lt1"/>
+                </a:fontRef>
+              </p:style>
+              <p:txBody>
+                <a:bodyPr/>
+                <a:lstStyle/>
+                <a:p>
+                  <a:r>
+                    <a:rPr lang="zh-CN" altLang="en-US">
+                      <a:noFill/>
+                    </a:rPr>
+                    <a:t> </a:t>
+                  </a:r>
+                </a:p>
+              </p:txBody>
+            </p:sp>
+          </mc:Fallback>
+        </mc:AlternateContent>
+        <mc:AlternateContent xmlns:mc="http://schemas.openxmlformats.org/markup-compatibility/2006">
+          <mc:Choice xmlns:a14="http://schemas.microsoft.com/office/drawing/2010/main" Requires="a14">
+            <p:sp>
+              <p:nvSpPr>
+                <p:cNvPr id="19" name="矩形 18"/>
+                <p:cNvSpPr/>
+                <p:nvPr/>
+              </p:nvSpPr>
+              <p:spPr>
+                <a:xfrm>
+                  <a:off x="8132" y="7004"/>
+                  <a:ext cx="545" cy="545"/>
+                </a:xfrm>
+                <a:prstGeom prst="rect">
+                  <a:avLst/>
+                </a:prstGeom>
+                <a:solidFill>
+                  <a:schemeClr val="accent6">
+                    <a:lumMod val="20000"/>
+                    <a:lumOff val="80000"/>
+                  </a:schemeClr>
+                </a:solidFill>
+                <a:ln>
+                  <a:solidFill>
+                    <a:schemeClr val="accent6"/>
+                  </a:solidFill>
+                </a:ln>
+              </p:spPr>
+              <p:style>
+                <a:lnRef idx="2">
+                  <a:schemeClr val="accent1">
+                    <a:lumMod val="75000"/>
+                  </a:schemeClr>
+                </a:lnRef>
+                <a:fillRef idx="1">
+                  <a:schemeClr val="accent1"/>
+                </a:fillRef>
+                <a:effectRef idx="0">
+                  <a:srgbClr val="FFFFFF"/>
+                </a:effectRef>
+                <a:fontRef idx="minor">
+                  <a:schemeClr val="lt1"/>
+                </a:fontRef>
+              </p:style>
+              <p:txBody>
+                <a:bodyPr rtlCol="0" anchor="ctr"/>
+                <a:p>
+                  <a:pPr algn="ctr"/>
+                  <a14:m>
+                    <m:oMathPara xmlns:m="http://schemas.openxmlformats.org/officeDocument/2006/math">
+                      <m:oMathParaPr>
+                        <m:jc m:val="centerGroup"/>
+                      </m:oMathParaPr>
+                      <m:oMath xmlns:m="http://schemas.openxmlformats.org/officeDocument/2006/math">
+                        <m:sSub>
+                          <m:sSubPr>
+                            <m:ctrlPr>
+                              <a:rPr lang="en-US" altLang="zh-CN" sz="1400" i="1">
+                                <a:solidFill>
+                                  <a:schemeClr val="tx1"/>
+                                </a:solidFill>
+                                <a:latin typeface="Cambria Math" panose="02040503050406030204" charset="0"/>
+                                <a:cs typeface="Cambria Math" panose="02040503050406030204" charset="0"/>
+                              </a:rPr>
+                            </m:ctrlPr>
+                          </m:sSubPr>
+                          <m:e>
+                            <m:r>
+                              <a:rPr lang="en-US" altLang="zh-CN" sz="1400" i="1">
+                                <a:solidFill>
+                                  <a:schemeClr val="tx1"/>
+                                </a:solidFill>
+                                <a:latin typeface="Cambria Math" panose="02040503050406030204" charset="0"/>
+                                <a:cs typeface="Cambria Math" panose="02040503050406030204" charset="0"/>
+                              </a:rPr>
+                              <m:t>𝑤</m:t>
+                            </m:r>
+                          </m:e>
+                          <m:sub>
+                            <m:r>
+                              <a:rPr lang="en-US" altLang="zh-CN" sz="1400" i="1">
+                                <a:solidFill>
+                                  <a:schemeClr val="tx1"/>
+                                </a:solidFill>
+                                <a:latin typeface="Cambria Math" panose="02040503050406030204" charset="0"/>
+                                <a:cs typeface="Cambria Math" panose="02040503050406030204" charset="0"/>
+                              </a:rPr>
+                              <m:t>2</m:t>
+                            </m:r>
+                          </m:sub>
+                        </m:sSub>
+                      </m:oMath>
+                    </m:oMathPara>
+                  </a14:m>
+                  <a:endParaRPr lang="zh-CN" altLang="en-US" sz="1400"/>
+                </a:p>
+              </p:txBody>
+            </p:sp>
+          </mc:Choice>
+          <mc:Fallback>
+            <p:sp>
+              <p:nvSpPr>
+                <p:cNvPr id="19" name="矩形 18"/>
+                <p:cNvSpPr>
+                  <a:spLocks noRot="1" noChangeAspect="1" noMove="1" noResize="1" noEditPoints="1" noAdjustHandles="1" noChangeArrowheads="1" noChangeShapeType="1" noTextEdit="1"/>
+                </p:cNvSpPr>
+                <p:nvPr/>
+              </p:nvSpPr>
+              <p:spPr>
+                <a:xfrm>
+                  <a:off x="8132" y="7004"/>
+                  <a:ext cx="545" cy="545"/>
+                </a:xfrm>
+                <a:prstGeom prst="rect">
+                  <a:avLst/>
+                </a:prstGeom>
+                <a:blipFill rotWithShape="1">
+                  <a:blip r:embed="rId2"/>
+                </a:blipFill>
+                <a:ln>
+                  <a:solidFill>
+                    <a:schemeClr val="accent6"/>
+                  </a:solidFill>
+                </a:ln>
+              </p:spPr>
+              <p:style>
+                <a:lnRef idx="2">
+                  <a:schemeClr val="accent1">
+                    <a:lumMod val="75000"/>
+                  </a:schemeClr>
+                </a:lnRef>
+                <a:fillRef idx="1">
+                  <a:schemeClr val="accent1"/>
+                </a:fillRef>
+                <a:effectRef idx="0">
+                  <a:srgbClr val="FFFFFF"/>
+                </a:effectRef>
+                <a:fontRef idx="minor">
+                  <a:schemeClr val="lt1"/>
+                </a:fontRef>
+              </p:style>
+              <p:txBody>
+                <a:bodyPr/>
+                <a:lstStyle/>
+                <a:p>
+                  <a:r>
+                    <a:rPr lang="zh-CN" altLang="en-US">
+                      <a:noFill/>
+                    </a:rPr>
+                    <a:t> </a:t>
+                  </a:r>
+                </a:p>
+              </p:txBody>
+            </p:sp>
+          </mc:Fallback>
+        </mc:AlternateContent>
+        <p:sp>
+          <p:nvSpPr>
+            <p:cNvPr id="20" name="左大括号 19"/>
+            <p:cNvSpPr/>
+            <p:nvPr/>
+          </p:nvSpPr>
+          <p:spPr>
+            <a:xfrm>
+              <a:off x="11009" y="1034"/>
+              <a:ext cx="368" cy="3687"/>
+            </a:xfrm>
+            <a:prstGeom prst="leftBrace">
+              <a:avLst>
+                <a:gd name="adj1" fmla="val 70108"/>
+                <a:gd name="adj2" fmla="val 50000"/>
+              </a:avLst>
+            </a:prstGeom>
+            <a:ln>
+              <a:solidFill>
+                <a:schemeClr val="accent5"/>
+              </a:solidFill>
+            </a:ln>
+          </p:spPr>
+          <p:style>
+            <a:lnRef idx="2">
+              <a:schemeClr val="accent1"/>
+            </a:lnRef>
+            <a:fillRef idx="0">
+              <a:srgbClr val="FFFFFF"/>
+            </a:fillRef>
+            <a:effectRef idx="0">
+              <a:srgbClr val="FFFFFF"/>
+            </a:effectRef>
+            <a:fontRef idx="minor">
+              <a:schemeClr val="tx1"/>
+            </a:fontRef>
+          </p:style>
+          <p:txBody>
+            <a:bodyPr rtlCol="0" anchor="ctr"/>
+            <a:p>
+              <a:pPr algn="ctr"/>
+              <a:endParaRPr lang="zh-CN" altLang="en-US"/>
+            </a:p>
+          </p:txBody>
+        </p:sp>
+        <mc:AlternateContent xmlns:mc="http://schemas.openxmlformats.org/markup-compatibility/2006">
+          <mc:Choice xmlns:a14="http://schemas.microsoft.com/office/drawing/2010/main" Requires="a14">
+            <p:sp>
+              <p:nvSpPr>
+                <p:cNvPr id="25" name="文本框 24"/>
+                <p:cNvSpPr txBox="1"/>
+                <p:nvPr/>
+              </p:nvSpPr>
+              <p:spPr>
+                <a:xfrm>
+                  <a:off x="6424" y="518"/>
+                  <a:ext cx="744" cy="682"/>
+                </a:xfrm>
+                <a:prstGeom prst="rect">
+                  <a:avLst/>
+                </a:prstGeom>
+                <a:noFill/>
+              </p:spPr>
+              <p:txBody>
+                <a:bodyPr wrap="square" rtlCol="0">
+                  <a:spAutoFit/>
+                </a:bodyPr>
+                <a:p>
+                  <a14:m>
+                    <m:oMathPara xmlns:m="http://schemas.openxmlformats.org/officeDocument/2006/math">
+                      <m:oMathParaPr>
+                        <m:jc m:val="centerGroup"/>
+                      </m:oMathParaPr>
+                      <m:oMath xmlns:m="http://schemas.openxmlformats.org/officeDocument/2006/math">
+                        <m:sSub>
+                          <m:sSubPr>
+                            <m:ctrlPr>
+                              <a:rPr lang="en-US" i="1">
+                                <a:latin typeface="Cambria Math" panose="02040503050406030204" charset="0"/>
+                                <a:cs typeface="Cambria Math" panose="02040503050406030204" charset="0"/>
+                              </a:rPr>
+                            </m:ctrlPr>
+                          </m:sSubPr>
+                          <m:e>
+                            <m:r>
+                              <a:rPr lang="en-US" i="1">
+                                <a:latin typeface="Cambria Math" panose="02040503050406030204" charset="0"/>
+                                <a:cs typeface="Cambria Math" panose="02040503050406030204" charset="0"/>
+                              </a:rPr>
+                              <m:t>𝑊</m:t>
+                            </m:r>
+                          </m:e>
+                          <m:sub>
+                            <m:r>
+                              <a:rPr lang="en-US" i="1">
+                                <a:latin typeface="Cambria Math" panose="02040503050406030204" charset="0"/>
+                                <a:cs typeface="Cambria Math" panose="02040503050406030204" charset="0"/>
+                              </a:rPr>
+                              <m:t>1</m:t>
+                            </m:r>
+                          </m:sub>
+                        </m:sSub>
+                      </m:oMath>
+                    </m:oMathPara>
+                  </a14:m>
+                  <a:endParaRPr lang="en-US"/>
+                </a:p>
+              </p:txBody>
+            </p:sp>
+          </mc:Choice>
+          <mc:Fallback>
+            <p:sp>
+              <p:nvSpPr>
+                <p:cNvPr id="25" name="文本框 24"/>
+                <p:cNvSpPr txBox="1">
+                  <a:spLocks noRot="1" noChangeAspect="1" noMove="1" noResize="1" noEditPoints="1" noAdjustHandles="1" noChangeArrowheads="1" noChangeShapeType="1" noTextEdit="1"/>
+                </p:cNvSpPr>
+                <p:nvPr/>
+              </p:nvSpPr>
+              <p:spPr>
+                <a:xfrm>
+                  <a:off x="6424" y="518"/>
+                  <a:ext cx="744" cy="682"/>
+                </a:xfrm>
+                <a:prstGeom prst="rect">
+                  <a:avLst/>
+                </a:prstGeom>
+                <a:blipFill rotWithShape="1">
+                  <a:blip r:embed="rId3"/>
+                </a:blipFill>
+              </p:spPr>
+              <p:txBody>
+                <a:bodyPr/>
+                <a:lstStyle/>
+                <a:p>
+                  <a:r>
+                    <a:rPr lang="zh-CN" altLang="en-US">
+                      <a:noFill/>
+                    </a:rPr>
+                    <a:t> </a:t>
+                  </a:r>
+                </a:p>
+              </p:txBody>
+            </p:sp>
+          </mc:Fallback>
+        </mc:AlternateContent>
+        <p:sp>
+          <p:nvSpPr>
+            <p:cNvPr id="26" name="矩形 25"/>
+            <p:cNvSpPr/>
+            <p:nvPr/>
+          </p:nvSpPr>
+          <p:spPr>
+            <a:xfrm>
+              <a:off x="1623" y="4368"/>
+              <a:ext cx="2985" cy="2985"/>
+            </a:xfrm>
+            <a:prstGeom prst="rect">
+              <a:avLst/>
+            </a:prstGeom>
+            <a:solidFill>
+              <a:schemeClr val="accent1">
+                <a:lumMod val="60000"/>
+                <a:lumOff val="40000"/>
+              </a:schemeClr>
             </a:solidFill>
-          </a:ln>
-        </p:spPr>
-        <p:style>
-          <a:lnRef idx="2">
-            <a:schemeClr val="accent1">
-              <a:lumMod val="75000"/>
-            </a:schemeClr>
-          </a:lnRef>
-          <a:fillRef idx="1">
-            <a:schemeClr val="accent1"/>
-          </a:fillRef>
-          <a:effectRef idx="0">
-            <a:srgbClr val="FFFFFF"/>
-          </a:effectRef>
-          <a:fontRef idx="minor">
-            <a:schemeClr val="lt1"/>
-          </a:fontRef>
-        </p:style>
-        <p:txBody>
-          <a:bodyPr rtlCol="0" anchor="ctr"/>
-          <a:p>
-            <a:pPr algn="ctr"/>
-            <a:endParaRPr lang="zh-CN" altLang="en-US"/>
-          </a:p>
-        </p:txBody>
-      </p:sp>
-      <p:sp>
-        <p:nvSpPr>
-          <p:cNvPr id="17" name="左大括号 16"/>
-          <p:cNvSpPr/>
-          <p:nvPr/>
-        </p:nvSpPr>
-        <p:spPr>
-          <a:xfrm rot="5400000">
-            <a:off x="4882515" y="-1043305"/>
-            <a:ext cx="233680" cy="2405380"/>
-          </a:xfrm>
-          <a:prstGeom prst="leftBrace">
-            <a:avLst>
-              <a:gd name="adj1" fmla="val 70108"/>
-              <a:gd name="adj2" fmla="val 50000"/>
-            </a:avLst>
-          </a:prstGeom>
-          <a:ln>
+          </p:spPr>
+          <p:style>
+            <a:lnRef idx="2">
+              <a:schemeClr val="accent1">
+                <a:lumMod val="75000"/>
+              </a:schemeClr>
+            </a:lnRef>
+            <a:fillRef idx="1">
+              <a:schemeClr val="accent1"/>
+            </a:fillRef>
+            <a:effectRef idx="0">
+              <a:srgbClr val="FFFFFF"/>
+            </a:effectRef>
+            <a:fontRef idx="minor">
+              <a:schemeClr val="lt1"/>
+            </a:fontRef>
+          </p:style>
+          <p:txBody>
+            <a:bodyPr rtlCol="0" anchor="ctr"/>
+            <a:p>
+              <a:pPr algn="ctr"/>
+              <a:endParaRPr lang="zh-CN" altLang="en-US"/>
+            </a:p>
+          </p:txBody>
+        </p:sp>
+        <p:sp>
+          <p:nvSpPr>
+            <p:cNvPr id="27" name="矩形 26"/>
+            <p:cNvSpPr/>
+            <p:nvPr/>
+          </p:nvSpPr>
+          <p:spPr>
+            <a:xfrm>
+              <a:off x="1623" y="7701"/>
+              <a:ext cx="2985" cy="2985"/>
+            </a:xfrm>
+            <a:prstGeom prst="rect">
+              <a:avLst/>
+            </a:prstGeom>
             <a:solidFill>
-              <a:schemeClr val="accent5"/>
+              <a:schemeClr val="accent1">
+                <a:lumMod val="60000"/>
+                <a:lumOff val="40000"/>
+              </a:schemeClr>
             </a:solidFill>
-          </a:ln>
-        </p:spPr>
-        <p:style>
-          <a:lnRef idx="2">
-            <a:schemeClr val="accent1"/>
-          </a:lnRef>
-          <a:fillRef idx="0">
-            <a:srgbClr val="FFFFFF"/>
-          </a:fillRef>
-          <a:effectRef idx="0">
-            <a:srgbClr val="FFFFFF"/>
-          </a:effectRef>
-          <a:fontRef idx="minor">
-            <a:schemeClr val="tx1"/>
-          </a:fontRef>
-        </p:style>
-        <p:txBody>
-          <a:bodyPr rtlCol="0" anchor="ctr"/>
-          <a:p>
-            <a:pPr algn="ctr"/>
-            <a:endParaRPr lang="zh-CN" altLang="en-US"/>
-          </a:p>
-        </p:txBody>
-      </p:sp>
-      <mc:AlternateContent xmlns:mc="http://schemas.openxmlformats.org/markup-compatibility/2006">
-        <mc:Choice xmlns:a14="http://schemas.microsoft.com/office/drawing/2010/main" Requires="a14">
-          <p:sp>
-            <p:nvSpPr>
-              <p:cNvPr id="18" name="矩形 17"/>
-              <p:cNvSpPr/>
-              <p:nvPr/>
-            </p:nvSpPr>
-            <p:spPr>
-              <a:xfrm>
-                <a:off x="3796665" y="4447540"/>
-                <a:ext cx="340995" cy="340995"/>
-              </a:xfrm>
-              <a:prstGeom prst="rect">
-                <a:avLst/>
-              </a:prstGeom>
-              <a:solidFill>
-                <a:schemeClr val="accent6">
-                  <a:lumMod val="60000"/>
-                  <a:lumOff val="40000"/>
-                </a:schemeClr>
-              </a:solidFill>
-              <a:ln>
-                <a:solidFill>
-                  <a:schemeClr val="accent6"/>
-                </a:solidFill>
-              </a:ln>
-            </p:spPr>
-            <p:style>
-              <a:lnRef idx="2">
-                <a:schemeClr val="accent1">
-                  <a:lumMod val="75000"/>
-                </a:schemeClr>
-              </a:lnRef>
-              <a:fillRef idx="1">
-                <a:schemeClr val="accent1"/>
-              </a:fillRef>
-              <a:effectRef idx="0">
-                <a:srgbClr val="FFFFFF"/>
-              </a:effectRef>
-              <a:fontRef idx="minor">
-                <a:schemeClr val="lt1"/>
-              </a:fontRef>
-            </p:style>
-            <p:txBody>
-              <a:bodyPr rtlCol="0" anchor="ctr"/>
-              <a:p>
-                <a:pPr algn="ctr"/>
-                <a14:m>
-                  <m:oMathPara xmlns:m="http://schemas.openxmlformats.org/officeDocument/2006/math">
-                    <m:oMathParaPr>
-                      <m:jc m:val="centerGroup"/>
-                    </m:oMathParaPr>
-                    <m:oMath xmlns:m="http://schemas.openxmlformats.org/officeDocument/2006/math">
-                      <m:sSub>
-                        <m:sSubPr>
-                          <m:ctrlPr>
-                            <a:rPr lang="en-US" altLang="zh-CN" sz="1400" i="1">
-                              <a:solidFill>
-                                <a:schemeClr val="tx1"/>
-                              </a:solidFill>
-                              <a:latin typeface="Cambria Math" panose="02040503050406030204" charset="0"/>
-                              <a:cs typeface="Cambria Math" panose="02040503050406030204" charset="0"/>
-                            </a:rPr>
-                          </m:ctrlPr>
-                        </m:sSubPr>
-                        <m:e>
-                          <m:r>
-                            <a:rPr lang="en-US" altLang="zh-CN" sz="1400" i="1">
-                              <a:solidFill>
-                                <a:schemeClr val="tx1"/>
-                              </a:solidFill>
-                              <a:latin typeface="Cambria Math" panose="02040503050406030204" charset="0"/>
-                              <a:cs typeface="Cambria Math" panose="02040503050406030204" charset="0"/>
-                            </a:rPr>
-                            <m:t>𝑤</m:t>
-                          </m:r>
-                        </m:e>
-                        <m:sub>
-                          <m:r>
-                            <a:rPr lang="en-US" altLang="zh-CN" sz="1400" i="1">
-                              <a:solidFill>
-                                <a:schemeClr val="tx1"/>
-                              </a:solidFill>
-                              <a:latin typeface="Cambria Math" panose="02040503050406030204" charset="0"/>
-                              <a:cs typeface="Cambria Math" panose="02040503050406030204" charset="0"/>
-                            </a:rPr>
-                            <m:t>1</m:t>
-                          </m:r>
-                        </m:sub>
-                      </m:sSub>
-                    </m:oMath>
-                  </m:oMathPara>
-                </a14:m>
-                <a:endParaRPr lang="en-US" altLang="zh-CN" sz="1400" i="1">
+          </p:spPr>
+          <p:style>
+            <a:lnRef idx="2">
+              <a:schemeClr val="accent1">
+                <a:lumMod val="75000"/>
+              </a:schemeClr>
+            </a:lnRef>
+            <a:fillRef idx="1">
+              <a:schemeClr val="accent1"/>
+            </a:fillRef>
+            <a:effectRef idx="0">
+              <a:srgbClr val="FFFFFF"/>
+            </a:effectRef>
+            <a:fontRef idx="minor">
+              <a:schemeClr val="lt1"/>
+            </a:fontRef>
+          </p:style>
+          <p:txBody>
+            <a:bodyPr rtlCol="0" anchor="ctr"/>
+            <a:p>
+              <a:pPr algn="ctr"/>
+              <a:endParaRPr lang="zh-CN" altLang="en-US"/>
+            </a:p>
+          </p:txBody>
+        </p:sp>
+        <p:sp>
+          <p:nvSpPr>
+            <p:cNvPr id="28" name="文本框 27"/>
+            <p:cNvSpPr txBox="1"/>
+            <p:nvPr/>
+          </p:nvSpPr>
+          <p:spPr>
+            <a:xfrm>
+              <a:off x="7264" y="-544"/>
+              <a:ext cx="1285" cy="682"/>
+            </a:xfrm>
+            <a:prstGeom prst="rect">
+              <a:avLst/>
+            </a:prstGeom>
+            <a:noFill/>
+          </p:spPr>
+          <p:txBody>
+            <a:bodyPr wrap="square" rtlCol="0">
+              <a:spAutoFit/>
+            </a:bodyPr>
+            <a:p>
+              <a:r>
+                <a:rPr lang="en-US" altLang="zh-CN">
                   <a:solidFill>
-                    <a:schemeClr val="tx1"/>
+                    <a:schemeClr val="accent5"/>
                   </a:solidFill>
-                  <a:latin typeface="Cambria Math" panose="02040503050406030204" charset="0"/>
-                  <a:cs typeface="Cambria Math" panose="02040503050406030204" charset="0"/>
-                </a:endParaRPr>
-              </a:p>
-            </p:txBody>
-          </p:sp>
-        </mc:Choice>
-        <mc:Fallback>
-          <p:sp>
-            <p:nvSpPr>
-              <p:cNvPr id="18" name="矩形 17"/>
-              <p:cNvSpPr>
-                <a:spLocks noRot="1" noChangeAspect="1" noMove="1" noResize="1" noEditPoints="1" noAdjustHandles="1" noChangeArrowheads="1" noChangeShapeType="1" noTextEdit="1"/>
-              </p:cNvSpPr>
-              <p:nvPr/>
-            </p:nvSpPr>
-            <p:spPr>
-              <a:xfrm>
-                <a:off x="3796665" y="4447540"/>
-                <a:ext cx="340995" cy="340995"/>
-              </a:xfrm>
-              <a:prstGeom prst="rect">
-                <a:avLst/>
-              </a:prstGeom>
-              <a:blipFill rotWithShape="1">
-                <a:blip r:embed="rId1"/>
-                <a:stretch>
-                  <a:fillRect l="-1862" t="-1862" r="-1862" b="-1862"/>
-                </a:stretch>
-              </a:blipFill>
-              <a:ln>
-                <a:solidFill>
-                  <a:schemeClr val="accent6"/>
-                </a:solidFill>
-              </a:ln>
-            </p:spPr>
-            <p:style>
-              <a:lnRef idx="2">
-                <a:schemeClr val="accent1">
-                  <a:lumMod val="75000"/>
-                </a:schemeClr>
-              </a:lnRef>
-              <a:fillRef idx="1">
-                <a:schemeClr val="accent1"/>
-              </a:fillRef>
-              <a:effectRef idx="0">
-                <a:srgbClr val="FFFFFF"/>
-              </a:effectRef>
-              <a:fontRef idx="minor">
-                <a:schemeClr val="lt1"/>
-              </a:fontRef>
-            </p:style>
-            <p:txBody>
-              <a:bodyPr/>
-              <a:lstStyle/>
-              <a:p>
-                <a:r>
-                  <a:rPr lang="zh-CN" altLang="en-US">
-                    <a:noFill/>
-                  </a:rPr>
-                  <a:t> </a:t>
-                </a:r>
-              </a:p>
-            </p:txBody>
-          </p:sp>
-        </mc:Fallback>
-      </mc:AlternateContent>
-      <mc:AlternateContent xmlns:mc="http://schemas.openxmlformats.org/markup-compatibility/2006">
-        <mc:Choice xmlns:a14="http://schemas.microsoft.com/office/drawing/2010/main" Requires="a14">
-          <p:sp>
-            <p:nvSpPr>
-              <p:cNvPr id="19" name="矩形 18"/>
-              <p:cNvSpPr/>
-              <p:nvPr/>
-            </p:nvSpPr>
-            <p:spPr>
-              <a:xfrm>
-                <a:off x="5163820" y="4447540"/>
-                <a:ext cx="346075" cy="346075"/>
-              </a:xfrm>
-              <a:prstGeom prst="rect">
-                <a:avLst/>
-              </a:prstGeom>
-              <a:solidFill>
-                <a:schemeClr val="accent6">
-                  <a:lumMod val="20000"/>
-                  <a:lumOff val="80000"/>
-                </a:schemeClr>
-              </a:solidFill>
-              <a:ln>
-                <a:solidFill>
-                  <a:schemeClr val="accent6"/>
-                </a:solidFill>
-              </a:ln>
-            </p:spPr>
-            <p:style>
-              <a:lnRef idx="2">
-                <a:schemeClr val="accent1">
-                  <a:lumMod val="75000"/>
-                </a:schemeClr>
-              </a:lnRef>
-              <a:fillRef idx="1">
-                <a:schemeClr val="accent1"/>
-              </a:fillRef>
-              <a:effectRef idx="0">
-                <a:srgbClr val="FFFFFF"/>
-              </a:effectRef>
-              <a:fontRef idx="minor">
-                <a:schemeClr val="lt1"/>
-              </a:fontRef>
-            </p:style>
-            <p:txBody>
-              <a:bodyPr rtlCol="0" anchor="ctr"/>
-              <a:p>
-                <a:pPr algn="ctr"/>
-                <a14:m>
-                  <m:oMathPara xmlns:m="http://schemas.openxmlformats.org/officeDocument/2006/math">
-                    <m:oMathParaPr>
-                      <m:jc m:val="centerGroup"/>
-                    </m:oMathParaPr>
-                    <m:oMath xmlns:m="http://schemas.openxmlformats.org/officeDocument/2006/math">
-                      <m:sSub>
-                        <m:sSubPr>
-                          <m:ctrlPr>
-                            <a:rPr lang="en-US" altLang="zh-CN" sz="1400" i="1">
-                              <a:solidFill>
-                                <a:schemeClr val="tx1"/>
-                              </a:solidFill>
-                              <a:latin typeface="Cambria Math" panose="02040503050406030204" charset="0"/>
-                              <a:cs typeface="Cambria Math" panose="02040503050406030204" charset="0"/>
-                            </a:rPr>
-                          </m:ctrlPr>
-                        </m:sSubPr>
-                        <m:e>
-                          <m:r>
-                            <a:rPr lang="en-US" altLang="zh-CN" sz="1400" i="1">
-                              <a:solidFill>
-                                <a:schemeClr val="tx1"/>
-                              </a:solidFill>
-                              <a:latin typeface="Cambria Math" panose="02040503050406030204" charset="0"/>
-                              <a:cs typeface="Cambria Math" panose="02040503050406030204" charset="0"/>
-                            </a:rPr>
-                            <m:t>𝑤</m:t>
-                          </m:r>
-                        </m:e>
-                        <m:sub>
-                          <m:r>
-                            <a:rPr lang="en-US" altLang="zh-CN" sz="1400" i="1">
-                              <a:solidFill>
-                                <a:schemeClr val="tx1"/>
-                              </a:solidFill>
-                              <a:latin typeface="Cambria Math" panose="02040503050406030204" charset="0"/>
-                              <a:cs typeface="Cambria Math" panose="02040503050406030204" charset="0"/>
-                            </a:rPr>
-                            <m:t>2</m:t>
-                          </m:r>
-                        </m:sub>
-                      </m:sSub>
-                    </m:oMath>
-                  </m:oMathPara>
-                </a14:m>
-                <a:endParaRPr lang="zh-CN" altLang="en-US" sz="1400"/>
-              </a:p>
-            </p:txBody>
-          </p:sp>
-        </mc:Choice>
-        <mc:Fallback>
-          <p:sp>
-            <p:nvSpPr>
-              <p:cNvPr id="19" name="矩形 18"/>
-              <p:cNvSpPr>
-                <a:spLocks noRot="1" noChangeAspect="1" noMove="1" noResize="1" noEditPoints="1" noAdjustHandles="1" noChangeArrowheads="1" noChangeShapeType="1" noTextEdit="1"/>
-              </p:cNvSpPr>
-              <p:nvPr/>
-            </p:nvSpPr>
-            <p:spPr>
-              <a:xfrm>
-                <a:off x="5163820" y="4447540"/>
-                <a:ext cx="346075" cy="346075"/>
-              </a:xfrm>
-              <a:prstGeom prst="rect">
-                <a:avLst/>
-              </a:prstGeom>
-              <a:blipFill rotWithShape="1">
-                <a:blip r:embed="rId2"/>
-                <a:stretch>
-                  <a:fillRect l="-1835" t="-1835" r="-1835" b="-1835"/>
-                </a:stretch>
-              </a:blipFill>
-              <a:ln>
-                <a:solidFill>
-                  <a:schemeClr val="accent6"/>
-                </a:solidFill>
-              </a:ln>
-            </p:spPr>
-            <p:style>
-              <a:lnRef idx="2">
-                <a:schemeClr val="accent1">
-                  <a:lumMod val="75000"/>
-                </a:schemeClr>
-              </a:lnRef>
-              <a:fillRef idx="1">
-                <a:schemeClr val="accent1"/>
-              </a:fillRef>
-              <a:effectRef idx="0">
-                <a:srgbClr val="FFFFFF"/>
-              </a:effectRef>
-              <a:fontRef idx="minor">
-                <a:schemeClr val="lt1"/>
-              </a:fontRef>
-            </p:style>
-            <p:txBody>
-              <a:bodyPr/>
-              <a:lstStyle/>
-              <a:p>
-                <a:r>
-                  <a:rPr lang="zh-CN" altLang="en-US">
-                    <a:noFill/>
-                  </a:rPr>
-                  <a:t> </a:t>
-                </a:r>
-              </a:p>
-            </p:txBody>
-          </p:sp>
-        </mc:Fallback>
-      </mc:AlternateContent>
-      <p:sp>
-        <p:nvSpPr>
-          <p:cNvPr id="20" name="左大括号 19"/>
-          <p:cNvSpPr/>
-          <p:nvPr/>
-        </p:nvSpPr>
-        <p:spPr>
-          <a:xfrm>
-            <a:off x="6990715" y="656590"/>
-            <a:ext cx="233680" cy="2341245"/>
-          </a:xfrm>
-          <a:prstGeom prst="leftBrace">
-            <a:avLst>
-              <a:gd name="adj1" fmla="val 70108"/>
-              <a:gd name="adj2" fmla="val 50000"/>
-            </a:avLst>
-          </a:prstGeom>
-          <a:ln>
-            <a:solidFill>
-              <a:schemeClr val="accent5"/>
-            </a:solidFill>
-          </a:ln>
-        </p:spPr>
-        <p:style>
-          <a:lnRef idx="2">
-            <a:schemeClr val="accent1"/>
-          </a:lnRef>
-          <a:fillRef idx="0">
-            <a:srgbClr val="FFFFFF"/>
-          </a:fillRef>
-          <a:effectRef idx="0">
-            <a:srgbClr val="FFFFFF"/>
-          </a:effectRef>
-          <a:fontRef idx="minor">
-            <a:schemeClr val="tx1"/>
-          </a:fontRef>
-        </p:style>
-        <p:txBody>
-          <a:bodyPr rtlCol="0" anchor="ctr"/>
-          <a:p>
-            <a:pPr algn="ctr"/>
-            <a:endParaRPr lang="zh-CN" altLang="en-US"/>
-          </a:p>
-        </p:txBody>
-      </p:sp>
-      <mc:AlternateContent xmlns:mc="http://schemas.openxmlformats.org/markup-compatibility/2006">
-        <mc:Choice xmlns:a14="http://schemas.microsoft.com/office/drawing/2010/main" Requires="a14">
-          <p:sp>
-            <p:nvSpPr>
-              <p:cNvPr id="25" name="文本框 24"/>
-              <p:cNvSpPr txBox="1"/>
-              <p:nvPr/>
-            </p:nvSpPr>
-            <p:spPr>
-              <a:xfrm>
-                <a:off x="4079240" y="328930"/>
-                <a:ext cx="472440" cy="368300"/>
-              </a:xfrm>
-              <a:prstGeom prst="rect">
-                <a:avLst/>
-              </a:prstGeom>
-              <a:noFill/>
-            </p:spPr>
-            <p:txBody>
-              <a:bodyPr wrap="square" rtlCol="0">
-                <a:spAutoFit/>
-              </a:bodyPr>
-              <a:p>
-                <a14:m>
-                  <m:oMathPara xmlns:m="http://schemas.openxmlformats.org/officeDocument/2006/math">
-                    <m:oMathParaPr>
-                      <m:jc m:val="centerGroup"/>
-                    </m:oMathParaPr>
-                    <m:oMath xmlns:m="http://schemas.openxmlformats.org/officeDocument/2006/math">
-                      <m:sSub>
-                        <m:sSubPr>
-                          <m:ctrlPr>
-                            <a:rPr lang="en-US" i="1">
-                              <a:latin typeface="Cambria Math" panose="02040503050406030204" charset="0"/>
-                              <a:cs typeface="Cambria Math" panose="02040503050406030204" charset="0"/>
-                            </a:rPr>
-                          </m:ctrlPr>
-                        </m:sSubPr>
-                        <m:e>
-                          <m:r>
-                            <a:rPr lang="en-US" i="1">
-                              <a:latin typeface="Cambria Math" panose="02040503050406030204" charset="0"/>
-                              <a:cs typeface="Cambria Math" panose="02040503050406030204" charset="0"/>
-                            </a:rPr>
-                            <m:t>𝑊</m:t>
-                          </m:r>
-                        </m:e>
-                        <m:sub>
-                          <m:r>
-                            <a:rPr lang="en-US" i="1">
-                              <a:latin typeface="Cambria Math" panose="02040503050406030204" charset="0"/>
-                              <a:cs typeface="Cambria Math" panose="02040503050406030204" charset="0"/>
-                            </a:rPr>
-                            <m:t>1</m:t>
-                          </m:r>
-                        </m:sub>
-                      </m:sSub>
-                    </m:oMath>
-                  </m:oMathPara>
-                </a14:m>
-                <a:endParaRPr lang="en-US"/>
-              </a:p>
-            </p:txBody>
-          </p:sp>
-        </mc:Choice>
-        <mc:Fallback>
-          <p:sp>
-            <p:nvSpPr>
-              <p:cNvPr id="25" name="文本框 24"/>
-              <p:cNvSpPr txBox="1">
-                <a:spLocks noRot="1" noChangeAspect="1" noMove="1" noResize="1" noEditPoints="1" noAdjustHandles="1" noChangeArrowheads="1" noChangeShapeType="1" noTextEdit="1"/>
-              </p:cNvSpPr>
-              <p:nvPr/>
-            </p:nvSpPr>
-            <p:spPr>
-              <a:xfrm>
-                <a:off x="4079240" y="328930"/>
-                <a:ext cx="472440" cy="368300"/>
-              </a:xfrm>
-              <a:prstGeom prst="rect">
-                <a:avLst/>
-              </a:prstGeom>
-              <a:blipFill rotWithShape="1">
-                <a:blip r:embed="rId3"/>
-                <a:stretch>
-                  <a:fillRect/>
-                </a:stretch>
-              </a:blipFill>
-            </p:spPr>
-            <p:txBody>
-              <a:bodyPr/>
-              <a:lstStyle/>
-              <a:p>
-                <a:r>
-                  <a:rPr lang="zh-CN" altLang="en-US">
-                    <a:noFill/>
-                  </a:rPr>
-                  <a:t> </a:t>
-                </a:r>
-              </a:p>
-            </p:txBody>
-          </p:sp>
-        </mc:Fallback>
-      </mc:AlternateContent>
-      <p:sp>
-        <p:nvSpPr>
-          <p:cNvPr id="26" name="矩形 25"/>
-          <p:cNvSpPr/>
-          <p:nvPr/>
-        </p:nvSpPr>
-        <p:spPr>
-          <a:xfrm>
-            <a:off x="1030605" y="2773680"/>
-            <a:ext cx="1895475" cy="1895475"/>
-          </a:xfrm>
-          <a:prstGeom prst="rect">
-            <a:avLst/>
-          </a:prstGeom>
-          <a:solidFill>
-            <a:schemeClr val="accent1">
-              <a:lumMod val="60000"/>
-              <a:lumOff val="40000"/>
-            </a:schemeClr>
-          </a:solidFill>
-        </p:spPr>
-        <p:style>
-          <a:lnRef idx="2">
-            <a:schemeClr val="accent1">
-              <a:lumMod val="75000"/>
-            </a:schemeClr>
-          </a:lnRef>
-          <a:fillRef idx="1">
-            <a:schemeClr val="accent1"/>
-          </a:fillRef>
-          <a:effectRef idx="0">
-            <a:srgbClr val="FFFFFF"/>
-          </a:effectRef>
-          <a:fontRef idx="minor">
-            <a:schemeClr val="lt1"/>
-          </a:fontRef>
-        </p:style>
-        <p:txBody>
-          <a:bodyPr rtlCol="0" anchor="ctr"/>
-          <a:p>
-            <a:pPr algn="ctr"/>
-            <a:endParaRPr lang="zh-CN" altLang="en-US"/>
-          </a:p>
-        </p:txBody>
-      </p:sp>
-      <p:sp>
-        <p:nvSpPr>
-          <p:cNvPr id="27" name="矩形 26"/>
-          <p:cNvSpPr/>
-          <p:nvPr/>
-        </p:nvSpPr>
-        <p:spPr>
-          <a:xfrm>
-            <a:off x="1030605" y="4890135"/>
-            <a:ext cx="1895475" cy="1895475"/>
-          </a:xfrm>
-          <a:prstGeom prst="rect">
-            <a:avLst/>
-          </a:prstGeom>
-          <a:solidFill>
-            <a:schemeClr val="accent1">
-              <a:lumMod val="60000"/>
-              <a:lumOff val="40000"/>
-            </a:schemeClr>
-          </a:solidFill>
-        </p:spPr>
-        <p:style>
-          <a:lnRef idx="2">
-            <a:schemeClr val="accent1">
-              <a:lumMod val="75000"/>
-            </a:schemeClr>
-          </a:lnRef>
-          <a:fillRef idx="1">
-            <a:schemeClr val="accent1"/>
-          </a:fillRef>
-          <a:effectRef idx="0">
-            <a:srgbClr val="FFFFFF"/>
-          </a:effectRef>
-          <a:fontRef idx="minor">
-            <a:schemeClr val="lt1"/>
-          </a:fontRef>
-        </p:style>
-        <p:txBody>
-          <a:bodyPr rtlCol="0" anchor="ctr"/>
-          <a:p>
-            <a:pPr algn="ctr"/>
-            <a:endParaRPr lang="zh-CN" altLang="en-US"/>
-          </a:p>
-        </p:txBody>
-      </p:sp>
-      <p:sp>
-        <p:nvSpPr>
-          <p:cNvPr id="28" name="文本框 27"/>
-          <p:cNvSpPr txBox="1"/>
-          <p:nvPr/>
-        </p:nvSpPr>
-        <p:spPr>
-          <a:xfrm>
-            <a:off x="4695190" y="-320675"/>
-            <a:ext cx="608965" cy="368300"/>
-          </a:xfrm>
-          <a:prstGeom prst="rect">
-            <a:avLst/>
-          </a:prstGeom>
-          <a:noFill/>
-        </p:spPr>
-        <p:txBody>
-          <a:bodyPr wrap="square" rtlCol="0">
-            <a:spAutoFit/>
-          </a:bodyPr>
-          <a:p>
-            <a:r>
-              <a:rPr lang="en-US" altLang="zh-CN">
+                </a:rPr>
+                <a:t>D=2</a:t>
+              </a:r>
+              <a:endParaRPr lang="en-US" altLang="zh-CN">
                 <a:solidFill>
                   <a:schemeClr val="accent5"/>
                 </a:solidFill>
-              </a:rPr>
-              <a:t>D=2</a:t>
-            </a:r>
-            <a:endParaRPr lang="en-US" altLang="zh-CN">
-              <a:solidFill>
-                <a:schemeClr val="accent5"/>
-              </a:solidFill>
-            </a:endParaRPr>
-          </a:p>
-        </p:txBody>
-      </p:sp>
-      <p:sp>
-        <p:nvSpPr>
-          <p:cNvPr id="29" name="文本框 28"/>
-          <p:cNvSpPr txBox="1"/>
-          <p:nvPr/>
-        </p:nvSpPr>
-        <p:spPr>
-          <a:xfrm>
-            <a:off x="6369050" y="1642745"/>
-            <a:ext cx="608965" cy="368300"/>
-          </a:xfrm>
-          <a:prstGeom prst="rect">
-            <a:avLst/>
-          </a:prstGeom>
-          <a:noFill/>
-        </p:spPr>
-        <p:txBody>
-          <a:bodyPr wrap="square" rtlCol="0">
-            <a:spAutoFit/>
-          </a:bodyPr>
-          <a:p>
-            <a:r>
-              <a:rPr lang="en-US" altLang="zh-CN">
+              </a:endParaRPr>
+            </a:p>
+          </p:txBody>
+        </p:sp>
+        <p:sp>
+          <p:nvSpPr>
+            <p:cNvPr id="29" name="文本框 28"/>
+            <p:cNvSpPr txBox="1"/>
+            <p:nvPr/>
+          </p:nvSpPr>
+          <p:spPr>
+            <a:xfrm>
+              <a:off x="9900" y="2535"/>
+              <a:ext cx="1128" cy="682"/>
+            </a:xfrm>
+            <a:prstGeom prst="rect">
+              <a:avLst/>
+            </a:prstGeom>
+            <a:noFill/>
+          </p:spPr>
+          <p:txBody>
+            <a:bodyPr wrap="square" rtlCol="0">
+              <a:spAutoFit/>
+            </a:bodyPr>
+            <a:p>
+              <a:r>
+                <a:rPr lang="en-US" altLang="zh-CN">
+                  <a:solidFill>
+                    <a:schemeClr val="accent5"/>
+                  </a:solidFill>
+                </a:rPr>
+                <a:t>D=2</a:t>
+              </a:r>
+              <a:endParaRPr lang="en-US" altLang="zh-CN">
                 <a:solidFill>
                   <a:schemeClr val="accent5"/>
                 </a:solidFill>
-              </a:rPr>
-              <a:t>D=2</a:t>
-            </a:r>
-            <a:endParaRPr lang="en-US" altLang="zh-CN">
+              </a:endParaRPr>
+            </a:p>
+          </p:txBody>
+        </p:sp>
+        <p:sp>
+          <p:nvSpPr>
+            <p:cNvPr id="30" name="矩形 29"/>
+            <p:cNvSpPr/>
+            <p:nvPr/>
+          </p:nvSpPr>
+          <p:spPr>
+            <a:xfrm>
+              <a:off x="5892" y="562"/>
+              <a:ext cx="1839" cy="7039"/>
+            </a:xfrm>
+            <a:prstGeom prst="rect">
+              <a:avLst/>
+            </a:prstGeom>
+            <a:noFill/>
+            <a:ln>
               <a:solidFill>
-                <a:schemeClr val="accent5"/>
+                <a:schemeClr val="tx1"/>
               </a:solidFill>
-            </a:endParaRPr>
-          </a:p>
-        </p:txBody>
-      </p:sp>
-      <p:sp>
-        <p:nvSpPr>
-          <p:cNvPr id="30" name="矩形 29"/>
-          <p:cNvSpPr/>
-          <p:nvPr/>
-        </p:nvSpPr>
-        <p:spPr>
-          <a:xfrm>
-            <a:off x="3741420" y="356870"/>
-            <a:ext cx="1167765" cy="4469765"/>
-          </a:xfrm>
-          <a:prstGeom prst="rect">
-            <a:avLst/>
-          </a:prstGeom>
-          <a:noFill/>
-          <a:ln>
-            <a:solidFill>
-              <a:schemeClr val="tx1"/>
-            </a:solidFill>
-            <a:prstDash val="dash"/>
-          </a:ln>
-        </p:spPr>
-        <p:style>
-          <a:lnRef idx="2">
-            <a:schemeClr val="accent1">
-              <a:lumMod val="75000"/>
-            </a:schemeClr>
-          </a:lnRef>
-          <a:fillRef idx="1">
-            <a:schemeClr val="accent1"/>
-          </a:fillRef>
-          <a:effectRef idx="0">
-            <a:srgbClr val="FFFFFF"/>
-          </a:effectRef>
-          <a:fontRef idx="minor">
-            <a:schemeClr val="lt1"/>
-          </a:fontRef>
-        </p:style>
-        <p:txBody>
-          <a:bodyPr rtlCol="0" anchor="ctr"/>
-          <a:p>
-            <a:pPr algn="ctr"/>
-            <a:endParaRPr lang="zh-CN" altLang="en-US"/>
-          </a:p>
-        </p:txBody>
-      </p:sp>
-      <mc:AlternateContent xmlns:mc="http://schemas.openxmlformats.org/markup-compatibility/2006">
-        <mc:Choice xmlns:a14="http://schemas.microsoft.com/office/drawing/2010/main" Requires="a14">
-          <p:sp>
-            <p:nvSpPr>
-              <p:cNvPr id="32" name="文本框 31"/>
-              <p:cNvSpPr txBox="1"/>
-              <p:nvPr/>
-            </p:nvSpPr>
-            <p:spPr>
-              <a:xfrm>
-                <a:off x="5428615" y="335915"/>
-                <a:ext cx="472440" cy="368300"/>
-              </a:xfrm>
-              <a:prstGeom prst="rect">
-                <a:avLst/>
-              </a:prstGeom>
-              <a:noFill/>
-            </p:spPr>
-            <p:txBody>
-              <a:bodyPr wrap="square" rtlCol="0">
-                <a:spAutoFit/>
-              </a:bodyPr>
-              <a:p>
-                <a14:m>
-                  <m:oMathPara xmlns:m="http://schemas.openxmlformats.org/officeDocument/2006/math">
-                    <m:oMathParaPr>
-                      <m:jc m:val="centerGroup"/>
-                    </m:oMathParaPr>
-                    <m:oMath xmlns:m="http://schemas.openxmlformats.org/officeDocument/2006/math">
-                      <m:sSub>
-                        <m:sSubPr>
-                          <m:ctrlPr>
-                            <a:rPr lang="en-US" i="1">
-                              <a:latin typeface="Cambria Math" panose="02040503050406030204" charset="0"/>
-                              <a:cs typeface="Cambria Math" panose="02040503050406030204" charset="0"/>
-                            </a:rPr>
-                          </m:ctrlPr>
-                        </m:sSubPr>
-                        <m:e>
-                          <m:r>
-                            <a:rPr lang="en-US" i="1">
-                              <a:latin typeface="Cambria Math" panose="02040503050406030204" charset="0"/>
-                              <a:cs typeface="Cambria Math" panose="02040503050406030204" charset="0"/>
-                            </a:rPr>
-                            <m:t>𝑊</m:t>
-                          </m:r>
-                        </m:e>
-                        <m:sub>
-                          <m:r>
-                            <a:rPr lang="en-US" i="1">
-                              <a:latin typeface="Cambria Math" panose="02040503050406030204" charset="0"/>
-                              <a:cs typeface="Cambria Math" panose="02040503050406030204" charset="0"/>
-                            </a:rPr>
-                            <m:t>2</m:t>
-                          </m:r>
-                        </m:sub>
-                      </m:sSub>
-                    </m:oMath>
-                  </m:oMathPara>
-                </a14:m>
-                <a:endParaRPr lang="en-US"/>
-              </a:p>
-            </p:txBody>
-          </p:sp>
-        </mc:Choice>
-        <mc:Fallback>
-          <p:sp>
-            <p:nvSpPr>
-              <p:cNvPr id="32" name="文本框 31"/>
-              <p:cNvSpPr txBox="1">
-                <a:spLocks noRot="1" noChangeAspect="1" noMove="1" noResize="1" noEditPoints="1" noAdjustHandles="1" noChangeArrowheads="1" noChangeShapeType="1" noTextEdit="1"/>
-              </p:cNvSpPr>
-              <p:nvPr/>
-            </p:nvSpPr>
-            <p:spPr>
-              <a:xfrm>
-                <a:off x="5428615" y="335915"/>
-                <a:ext cx="472440" cy="368300"/>
-              </a:xfrm>
-              <a:prstGeom prst="rect">
-                <a:avLst/>
-              </a:prstGeom>
-              <a:blipFill rotWithShape="1">
-                <a:blip r:embed="rId4"/>
-                <a:stretch>
-                  <a:fillRect/>
-                </a:stretch>
-              </a:blipFill>
-            </p:spPr>
-            <p:txBody>
-              <a:bodyPr/>
-              <a:lstStyle/>
-              <a:p>
-                <a:r>
-                  <a:rPr lang="zh-CN" altLang="en-US">
-                    <a:noFill/>
-                  </a:rPr>
-                  <a:t> </a:t>
-                </a:r>
-              </a:p>
-            </p:txBody>
-          </p:sp>
-        </mc:Fallback>
-      </mc:AlternateContent>
-      <p:sp>
-        <p:nvSpPr>
-          <p:cNvPr id="33" name="矩形 32"/>
-          <p:cNvSpPr/>
-          <p:nvPr/>
-        </p:nvSpPr>
-        <p:spPr>
-          <a:xfrm>
-            <a:off x="5090795" y="363855"/>
-            <a:ext cx="1167765" cy="4469765"/>
-          </a:xfrm>
-          <a:prstGeom prst="rect">
-            <a:avLst/>
-          </a:prstGeom>
-          <a:noFill/>
-          <a:ln>
-            <a:solidFill>
-              <a:schemeClr val="tx1"/>
-            </a:solidFill>
-            <a:prstDash val="dash"/>
-          </a:ln>
-        </p:spPr>
-        <p:style>
-          <a:lnRef idx="2">
-            <a:schemeClr val="accent1">
-              <a:lumMod val="75000"/>
-            </a:schemeClr>
-          </a:lnRef>
-          <a:fillRef idx="1">
-            <a:schemeClr val="accent1"/>
-          </a:fillRef>
-          <a:effectRef idx="0">
-            <a:srgbClr val="FFFFFF"/>
-          </a:effectRef>
-          <a:fontRef idx="minor">
-            <a:schemeClr val="lt1"/>
-          </a:fontRef>
-        </p:style>
-        <p:txBody>
-          <a:bodyPr rtlCol="0" anchor="ctr"/>
-          <a:p>
-            <a:pPr algn="ctr"/>
-            <a:endParaRPr lang="zh-CN" altLang="en-US"/>
-          </a:p>
-        </p:txBody>
-      </p:sp>
-      <p:sp>
-        <p:nvSpPr>
-          <p:cNvPr id="34" name="文本框 33"/>
-          <p:cNvSpPr txBox="1"/>
-          <p:nvPr/>
-        </p:nvSpPr>
-        <p:spPr>
-          <a:xfrm>
-            <a:off x="3107055" y="2294255"/>
-            <a:ext cx="379730" cy="368300"/>
-          </a:xfrm>
-          <a:prstGeom prst="rect">
-            <a:avLst/>
-          </a:prstGeom>
-          <a:noFill/>
-        </p:spPr>
-        <p:txBody>
-          <a:bodyPr wrap="square" rtlCol="0">
-            <a:spAutoFit/>
-          </a:bodyPr>
-          <a:p>
-            <a:r>
-              <a:rPr lang="en-US" altLang="zh-CN">
+              <a:prstDash val="dash"/>
+            </a:ln>
+          </p:spPr>
+          <p:style>
+            <a:lnRef idx="2">
+              <a:schemeClr val="accent1">
+                <a:lumMod val="75000"/>
+              </a:schemeClr>
+            </a:lnRef>
+            <a:fillRef idx="1">
+              <a:schemeClr val="accent1"/>
+            </a:fillRef>
+            <a:effectRef idx="0">
+              <a:srgbClr val="FFFFFF"/>
+            </a:effectRef>
+            <a:fontRef idx="minor">
+              <a:schemeClr val="lt1"/>
+            </a:fontRef>
+          </p:style>
+          <p:txBody>
+            <a:bodyPr rtlCol="0" anchor="ctr"/>
+            <a:p>
+              <a:pPr algn="ctr"/>
+              <a:endParaRPr lang="zh-CN" altLang="en-US"/>
+            </a:p>
+          </p:txBody>
+        </p:sp>
+        <mc:AlternateContent xmlns:mc="http://schemas.openxmlformats.org/markup-compatibility/2006">
+          <mc:Choice xmlns:a14="http://schemas.microsoft.com/office/drawing/2010/main" Requires="a14">
+            <p:sp>
+              <p:nvSpPr>
+                <p:cNvPr id="32" name="文本框 31"/>
+                <p:cNvSpPr txBox="1"/>
+                <p:nvPr/>
+              </p:nvSpPr>
+              <p:spPr>
+                <a:xfrm>
+                  <a:off x="8549" y="529"/>
+                  <a:ext cx="744" cy="682"/>
+                </a:xfrm>
+                <a:prstGeom prst="rect">
+                  <a:avLst/>
+                </a:prstGeom>
+                <a:noFill/>
+              </p:spPr>
+              <p:txBody>
+                <a:bodyPr wrap="square" rtlCol="0">
+                  <a:spAutoFit/>
+                </a:bodyPr>
+                <a:p>
+                  <a14:m>
+                    <m:oMathPara xmlns:m="http://schemas.openxmlformats.org/officeDocument/2006/math">
+                      <m:oMathParaPr>
+                        <m:jc m:val="centerGroup"/>
+                      </m:oMathParaPr>
+                      <m:oMath xmlns:m="http://schemas.openxmlformats.org/officeDocument/2006/math">
+                        <m:sSub>
+                          <m:sSubPr>
+                            <m:ctrlPr>
+                              <a:rPr lang="en-US" i="1">
+                                <a:latin typeface="Cambria Math" panose="02040503050406030204" charset="0"/>
+                                <a:cs typeface="Cambria Math" panose="02040503050406030204" charset="0"/>
+                              </a:rPr>
+                            </m:ctrlPr>
+                          </m:sSubPr>
+                          <m:e>
+                            <m:r>
+                              <a:rPr lang="en-US" i="1">
+                                <a:latin typeface="Cambria Math" panose="02040503050406030204" charset="0"/>
+                                <a:cs typeface="Cambria Math" panose="02040503050406030204" charset="0"/>
+                              </a:rPr>
+                              <m:t>𝑊</m:t>
+                            </m:r>
+                          </m:e>
+                          <m:sub>
+                            <m:r>
+                              <a:rPr lang="en-US" i="1">
+                                <a:latin typeface="Cambria Math" panose="02040503050406030204" charset="0"/>
+                                <a:cs typeface="Cambria Math" panose="02040503050406030204" charset="0"/>
+                              </a:rPr>
+                              <m:t>2</m:t>
+                            </m:r>
+                          </m:sub>
+                        </m:sSub>
+                      </m:oMath>
+                    </m:oMathPara>
+                  </a14:m>
+                  <a:endParaRPr lang="en-US"/>
+                </a:p>
+              </p:txBody>
+            </p:sp>
+          </mc:Choice>
+          <mc:Fallback>
+            <p:sp>
+              <p:nvSpPr>
+                <p:cNvPr id="32" name="文本框 31"/>
+                <p:cNvSpPr txBox="1">
+                  <a:spLocks noRot="1" noChangeAspect="1" noMove="1" noResize="1" noEditPoints="1" noAdjustHandles="1" noChangeArrowheads="1" noChangeShapeType="1" noTextEdit="1"/>
+                </p:cNvSpPr>
+                <p:nvPr/>
+              </p:nvSpPr>
+              <p:spPr>
+                <a:xfrm>
+                  <a:off x="8549" y="529"/>
+                  <a:ext cx="744" cy="682"/>
+                </a:xfrm>
+                <a:prstGeom prst="rect">
+                  <a:avLst/>
+                </a:prstGeom>
+                <a:blipFill rotWithShape="1">
+                  <a:blip r:embed="rId4"/>
+                </a:blipFill>
+              </p:spPr>
+              <p:txBody>
+                <a:bodyPr/>
+                <a:lstStyle/>
+                <a:p>
+                  <a:r>
+                    <a:rPr lang="zh-CN" altLang="en-US">
+                      <a:noFill/>
+                    </a:rPr>
+                    <a:t> </a:t>
+                  </a:r>
+                </a:p>
+              </p:txBody>
+            </p:sp>
+          </mc:Fallback>
+        </mc:AlternateContent>
+        <p:sp>
+          <p:nvSpPr>
+            <p:cNvPr id="33" name="矩形 32"/>
+            <p:cNvSpPr/>
+            <p:nvPr/>
+          </p:nvSpPr>
+          <p:spPr>
+            <a:xfrm>
+              <a:off x="8017" y="573"/>
+              <a:ext cx="1839" cy="7039"/>
+            </a:xfrm>
+            <a:prstGeom prst="rect">
+              <a:avLst/>
+            </a:prstGeom>
+            <a:noFill/>
+            <a:ln>
+              <a:solidFill>
+                <a:schemeClr val="tx1"/>
+              </a:solidFill>
+              <a:prstDash val="dash"/>
+            </a:ln>
+          </p:spPr>
+          <p:style>
+            <a:lnRef idx="2">
+              <a:schemeClr val="accent1">
+                <a:lumMod val="75000"/>
+              </a:schemeClr>
+            </a:lnRef>
+            <a:fillRef idx="1">
+              <a:schemeClr val="accent1"/>
+            </a:fillRef>
+            <a:effectRef idx="0">
+              <a:srgbClr val="FFFFFF"/>
+            </a:effectRef>
+            <a:fontRef idx="minor">
+              <a:schemeClr val="lt1"/>
+            </a:fontRef>
+          </p:style>
+          <p:txBody>
+            <a:bodyPr rtlCol="0" anchor="ctr"/>
+            <a:p>
+              <a:pPr algn="ctr"/>
+              <a:endParaRPr lang="zh-CN" altLang="en-US"/>
+            </a:p>
+          </p:txBody>
+        </p:sp>
+        <p:sp>
+          <p:nvSpPr>
+            <p:cNvPr id="34" name="文本框 33"/>
+            <p:cNvSpPr txBox="1"/>
+            <p:nvPr/>
+          </p:nvSpPr>
+          <p:spPr>
+            <a:xfrm>
+              <a:off x="4893" y="3613"/>
+              <a:ext cx="598" cy="682"/>
+            </a:xfrm>
+            <a:prstGeom prst="rect">
+              <a:avLst/>
+            </a:prstGeom>
+            <a:noFill/>
+          </p:spPr>
+          <p:txBody>
+            <a:bodyPr wrap="square" rtlCol="0">
+              <a:spAutoFit/>
+            </a:bodyPr>
+            <a:p>
+              <a:r>
+                <a:rPr lang="en-US" altLang="zh-CN">
+                  <a:solidFill>
+                    <a:schemeClr val="accent1"/>
+                  </a:solidFill>
+                </a:rPr>
+                <a:t>3</a:t>
+              </a:r>
+              <a:endParaRPr lang="en-US" altLang="zh-CN">
                 <a:solidFill>
                   <a:schemeClr val="accent1"/>
                 </a:solidFill>
-              </a:rPr>
-              <a:t>3</a:t>
-            </a:r>
-            <a:endParaRPr lang="en-US" altLang="zh-CN">
-              <a:solidFill>
-                <a:schemeClr val="accent1"/>
-              </a:solidFill>
-            </a:endParaRPr>
-          </a:p>
-        </p:txBody>
-      </p:sp>
-      <p:sp>
-        <p:nvSpPr>
-          <p:cNvPr id="35" name="文本框 34"/>
-          <p:cNvSpPr txBox="1"/>
-          <p:nvPr/>
-        </p:nvSpPr>
-        <p:spPr>
-          <a:xfrm>
-            <a:off x="3909060" y="6967220"/>
-            <a:ext cx="2094230" cy="829945"/>
-          </a:xfrm>
-          <a:prstGeom prst="rect">
-            <a:avLst/>
-          </a:prstGeom>
-          <a:noFill/>
-        </p:spPr>
-        <p:txBody>
-          <a:bodyPr wrap="square" rtlCol="0">
-            <a:spAutoFit/>
-          </a:bodyPr>
-          <a:p>
-            <a:r>
-              <a:rPr lang="en-US" altLang="zh-CN" sz="4800">
+              </a:endParaRPr>
+            </a:p>
+          </p:txBody>
+        </p:sp>
+        <p:sp>
+          <p:nvSpPr>
+            <p:cNvPr id="35" name="文本框 34"/>
+            <p:cNvSpPr txBox="1"/>
+            <p:nvPr/>
+          </p:nvSpPr>
+          <p:spPr>
+            <a:xfrm>
+              <a:off x="6156" y="10709"/>
+              <a:ext cx="3875" cy="1537"/>
+            </a:xfrm>
+            <a:prstGeom prst="rect">
+              <a:avLst/>
+            </a:prstGeom>
+            <a:noFill/>
+          </p:spPr>
+          <p:txBody>
+            <a:bodyPr wrap="square" rtlCol="0">
+              <a:spAutoFit/>
+            </a:bodyPr>
+            <a:p>
+              <a:r>
+                <a:rPr lang="en-US" altLang="zh-CN" sz="4800">
+                  <a:latin typeface="汉仪元隆黑-105简" panose="00020600040101010101" charset="-122"/>
+                  <a:ea typeface="汉仪元隆黑-105简" panose="00020600040101010101" charset="-122"/>
+                  <a:cs typeface="汉仪元隆黑-105简" panose="00020600040101010101" charset="-122"/>
+                </a:rPr>
+                <a:t>3 </a:t>
+              </a:r>
+              <a:r>
+                <a:rPr lang="zh-CN" altLang="en-US" sz="4800">
+                  <a:latin typeface="汉仪元隆黑-105简" panose="00020600040101010101" charset="-122"/>
+                  <a:ea typeface="汉仪元隆黑-105简" panose="00020600040101010101" charset="-122"/>
+                  <a:cs typeface="汉仪元隆黑-105简" panose="00020600040101010101" charset="-122"/>
+                </a:rPr>
+                <a:t>×</a:t>
+              </a:r>
+              <a:r>
+                <a:rPr lang="en-US" altLang="zh-CN" sz="4800">
+                  <a:latin typeface="汉仪元隆黑-105简" panose="00020600040101010101" charset="-122"/>
+                  <a:ea typeface="汉仪元隆黑-105简" panose="00020600040101010101" charset="-122"/>
+                  <a:cs typeface="汉仪元隆黑-105简" panose="00020600040101010101" charset="-122"/>
+                </a:rPr>
+                <a:t> 2</a:t>
+              </a:r>
+              <a:endParaRPr lang="en-US" altLang="zh-CN" sz="4800">
                 <a:latin typeface="汉仪元隆黑-105简" panose="00020600040101010101" charset="-122"/>
                 <a:ea typeface="汉仪元隆黑-105简" panose="00020600040101010101" charset="-122"/>
                 <a:cs typeface="汉仪元隆黑-105简" panose="00020600040101010101" charset="-122"/>
-              </a:rPr>
-              <a:t>3 </a:t>
-            </a:r>
-            <a:r>
-              <a:rPr lang="zh-CN" altLang="en-US" sz="4800">
+              </a:endParaRPr>
+            </a:p>
+          </p:txBody>
+        </p:sp>
+        <p:sp>
+          <p:nvSpPr>
+            <p:cNvPr id="36" name="文本框 35"/>
+            <p:cNvSpPr txBox="1"/>
+            <p:nvPr/>
+          </p:nvSpPr>
+          <p:spPr>
+            <a:xfrm>
+              <a:off x="2594" y="10686"/>
+              <a:ext cx="1146" cy="1537"/>
+            </a:xfrm>
+            <a:prstGeom prst="rect">
+              <a:avLst/>
+            </a:prstGeom>
+            <a:noFill/>
+          </p:spPr>
+          <p:txBody>
+            <a:bodyPr wrap="square" rtlCol="0">
+              <a:spAutoFit/>
+            </a:bodyPr>
+            <a:p>
+              <a:r>
+                <a:rPr lang="en-US" altLang="zh-CN" sz="4800">
+                  <a:latin typeface="汉仪元隆黑-105简" panose="00020600040101010101" charset="-122"/>
+                  <a:ea typeface="汉仪元隆黑-105简" panose="00020600040101010101" charset="-122"/>
+                  <a:cs typeface="汉仪元隆黑-105简" panose="00020600040101010101" charset="-122"/>
+                </a:rPr>
+                <a:t>3</a:t>
+              </a:r>
+              <a:endParaRPr lang="en-US" altLang="zh-CN" sz="4800">
                 <a:latin typeface="汉仪元隆黑-105简" panose="00020600040101010101" charset="-122"/>
                 <a:ea typeface="汉仪元隆黑-105简" panose="00020600040101010101" charset="-122"/>
                 <a:cs typeface="汉仪元隆黑-105简" panose="00020600040101010101" charset="-122"/>
-              </a:rPr>
-              <a:t>×</a:t>
-            </a:r>
-            <a:r>
-              <a:rPr lang="en-US" altLang="zh-CN" sz="4800">
+              </a:endParaRPr>
+            </a:p>
+          </p:txBody>
+        </p:sp>
+        <p:sp>
+          <p:nvSpPr>
+            <p:cNvPr id="37" name="文本框 36"/>
+            <p:cNvSpPr txBox="1"/>
+            <p:nvPr/>
+          </p:nvSpPr>
+          <p:spPr>
+            <a:xfrm>
+              <a:off x="11789" y="10709"/>
+              <a:ext cx="1146" cy="1537"/>
+            </a:xfrm>
+            <a:prstGeom prst="rect">
+              <a:avLst/>
+            </a:prstGeom>
+            <a:noFill/>
+          </p:spPr>
+          <p:txBody>
+            <a:bodyPr wrap="square" rtlCol="0">
+              <a:spAutoFit/>
+            </a:bodyPr>
+            <a:p>
+              <a:r>
+                <a:rPr lang="en-US" altLang="zh-CN" sz="4800">
+                  <a:latin typeface="汉仪元隆黑-105简" panose="00020600040101010101" charset="-122"/>
+                  <a:ea typeface="汉仪元隆黑-105简" panose="00020600040101010101" charset="-122"/>
+                  <a:cs typeface="汉仪元隆黑-105简" panose="00020600040101010101" charset="-122"/>
+                </a:rPr>
+                <a:t>2</a:t>
+              </a:r>
+              <a:endParaRPr lang="en-US" altLang="zh-CN" sz="4800">
                 <a:latin typeface="汉仪元隆黑-105简" panose="00020600040101010101" charset="-122"/>
                 <a:ea typeface="汉仪元隆黑-105简" panose="00020600040101010101" charset="-122"/>
                 <a:cs typeface="汉仪元隆黑-105简" panose="00020600040101010101" charset="-122"/>
-              </a:rPr>
-              <a:t> 2</a:t>
-            </a:r>
-            <a:endParaRPr lang="en-US" altLang="zh-CN" sz="4800">
-              <a:latin typeface="汉仪元隆黑-105简" panose="00020600040101010101" charset="-122"/>
-              <a:ea typeface="汉仪元隆黑-105简" panose="00020600040101010101" charset="-122"/>
-              <a:cs typeface="汉仪元隆黑-105简" panose="00020600040101010101" charset="-122"/>
-            </a:endParaRPr>
-          </a:p>
-        </p:txBody>
-      </p:sp>
-      <p:sp>
-        <p:nvSpPr>
-          <p:cNvPr id="36" name="文本框 35"/>
-          <p:cNvSpPr txBox="1"/>
-          <p:nvPr/>
-        </p:nvSpPr>
-        <p:spPr>
-          <a:xfrm>
-            <a:off x="1647190" y="7006590"/>
-            <a:ext cx="727710" cy="829945"/>
-          </a:xfrm>
-          <a:prstGeom prst="rect">
-            <a:avLst/>
-          </a:prstGeom>
-          <a:noFill/>
-        </p:spPr>
-        <p:txBody>
-          <a:bodyPr wrap="square" rtlCol="0">
-            <a:spAutoFit/>
-          </a:bodyPr>
-          <a:p>
-            <a:r>
-              <a:rPr lang="en-US" altLang="zh-CN" sz="4800">
-                <a:latin typeface="汉仪元隆黑-105简" panose="00020600040101010101" charset="-122"/>
-                <a:ea typeface="汉仪元隆黑-105简" panose="00020600040101010101" charset="-122"/>
-                <a:cs typeface="汉仪元隆黑-105简" panose="00020600040101010101" charset="-122"/>
-              </a:rPr>
-              <a:t>3</a:t>
-            </a:r>
-            <a:endParaRPr lang="en-US" altLang="zh-CN" sz="4800">
-              <a:latin typeface="汉仪元隆黑-105简" panose="00020600040101010101" charset="-122"/>
-              <a:ea typeface="汉仪元隆黑-105简" panose="00020600040101010101" charset="-122"/>
-              <a:cs typeface="汉仪元隆黑-105简" panose="00020600040101010101" charset="-122"/>
-            </a:endParaRPr>
-          </a:p>
-        </p:txBody>
-      </p:sp>
-      <p:sp>
-        <p:nvSpPr>
-          <p:cNvPr id="37" name="文本框 36"/>
-          <p:cNvSpPr txBox="1"/>
-          <p:nvPr/>
-        </p:nvSpPr>
-        <p:spPr>
-          <a:xfrm>
-            <a:off x="7486015" y="6945630"/>
-            <a:ext cx="727710" cy="829945"/>
-          </a:xfrm>
-          <a:prstGeom prst="rect">
-            <a:avLst/>
-          </a:prstGeom>
-          <a:noFill/>
-        </p:spPr>
-        <p:txBody>
-          <a:bodyPr wrap="square" rtlCol="0">
-            <a:spAutoFit/>
-          </a:bodyPr>
-          <a:p>
-            <a:r>
-              <a:rPr lang="en-US" altLang="zh-CN" sz="4800">
-                <a:latin typeface="汉仪元隆黑-105简" panose="00020600040101010101" charset="-122"/>
-                <a:ea typeface="汉仪元隆黑-105简" panose="00020600040101010101" charset="-122"/>
-                <a:cs typeface="汉仪元隆黑-105简" panose="00020600040101010101" charset="-122"/>
-              </a:rPr>
-              <a:t>2</a:t>
-            </a:r>
-            <a:endParaRPr lang="en-US" altLang="zh-CN" sz="4800">
-              <a:latin typeface="汉仪元隆黑-105简" panose="00020600040101010101" charset="-122"/>
-              <a:ea typeface="汉仪元隆黑-105简" panose="00020600040101010101" charset="-122"/>
-              <a:cs typeface="汉仪元隆黑-105简" panose="00020600040101010101" charset="-122"/>
-            </a:endParaRPr>
-          </a:p>
-        </p:txBody>
-      </p:sp>
-      <p:sp>
-        <p:nvSpPr>
-          <p:cNvPr id="38" name="文本框 37"/>
-          <p:cNvSpPr txBox="1"/>
-          <p:nvPr/>
-        </p:nvSpPr>
-        <p:spPr>
-          <a:xfrm>
-            <a:off x="4681855" y="-532130"/>
-            <a:ext cx="748030" cy="368300"/>
-          </a:xfrm>
-          <a:prstGeom prst="rect">
-            <a:avLst/>
-          </a:prstGeom>
-          <a:noFill/>
-        </p:spPr>
-        <p:txBody>
-          <a:bodyPr wrap="square" rtlCol="0">
-            <a:spAutoFit/>
-          </a:bodyPr>
-          <a:p>
-            <a:r>
-              <a:rPr lang="zh-CN" altLang="en-US">
+              </a:endParaRPr>
+            </a:p>
+          </p:txBody>
+        </p:sp>
+        <p:sp>
+          <p:nvSpPr>
+            <p:cNvPr id="38" name="文本框 37"/>
+            <p:cNvSpPr txBox="1"/>
+            <p:nvPr/>
+          </p:nvSpPr>
+          <p:spPr>
+            <a:xfrm>
+              <a:off x="7269" y="-942"/>
+              <a:ext cx="1636" cy="682"/>
+            </a:xfrm>
+            <a:prstGeom prst="rect">
+              <a:avLst/>
+            </a:prstGeom>
+            <a:noFill/>
+          </p:spPr>
+          <p:txBody>
+            <a:bodyPr wrap="square" rtlCol="0">
+              <a:spAutoFit/>
+            </a:bodyPr>
+            <a:p>
+              <a:r>
+                <a:rPr lang="zh-CN" altLang="en-US">
+                  <a:solidFill>
+                    <a:schemeClr val="accent5"/>
+                  </a:solidFill>
+                </a:rPr>
+                <a:t>深度</a:t>
+              </a:r>
+              <a:endParaRPr lang="zh-CN" altLang="en-US">
                 <a:solidFill>
                   <a:schemeClr val="accent5"/>
                 </a:solidFill>
-              </a:rPr>
-              <a:t>深度</a:t>
-            </a:r>
-            <a:endParaRPr lang="zh-CN" altLang="en-US">
+              </a:endParaRPr>
+            </a:p>
+          </p:txBody>
+        </p:sp>
+        <p:sp>
+          <p:nvSpPr>
+            <p:cNvPr id="39" name="矩形 38"/>
+            <p:cNvSpPr/>
+            <p:nvPr/>
+          </p:nvSpPr>
+          <p:spPr>
+            <a:xfrm>
+              <a:off x="1485" y="563"/>
+              <a:ext cx="3256" cy="10237"/>
+            </a:xfrm>
+            <a:prstGeom prst="rect">
+              <a:avLst/>
+            </a:prstGeom>
+            <a:noFill/>
+            <a:ln>
               <a:solidFill>
-                <a:schemeClr val="accent5"/>
+                <a:schemeClr val="tx1"/>
               </a:solidFill>
-            </a:endParaRPr>
-          </a:p>
-        </p:txBody>
-      </p:sp>
-      <p:sp>
-        <p:nvSpPr>
-          <p:cNvPr id="39" name="矩形 38"/>
-          <p:cNvSpPr/>
-          <p:nvPr/>
-        </p:nvSpPr>
-        <p:spPr>
-          <a:xfrm>
-            <a:off x="942975" y="357505"/>
-            <a:ext cx="2067560" cy="6500495"/>
-          </a:xfrm>
-          <a:prstGeom prst="rect">
-            <a:avLst/>
-          </a:prstGeom>
-          <a:noFill/>
-          <a:ln>
-            <a:solidFill>
-              <a:schemeClr val="tx1"/>
-            </a:solidFill>
-            <a:prstDash val="dash"/>
-          </a:ln>
-        </p:spPr>
-        <p:style>
-          <a:lnRef idx="2">
-            <a:schemeClr val="accent1">
-              <a:lumMod val="75000"/>
-            </a:schemeClr>
-          </a:lnRef>
-          <a:fillRef idx="1">
-            <a:schemeClr val="accent1"/>
-          </a:fillRef>
-          <a:effectRef idx="0">
-            <a:srgbClr val="FFFFFF"/>
-          </a:effectRef>
-          <a:fontRef idx="minor">
-            <a:schemeClr val="lt1"/>
-          </a:fontRef>
-        </p:style>
-        <p:txBody>
-          <a:bodyPr rtlCol="0" anchor="ctr"/>
-          <a:p>
-            <a:pPr algn="ctr"/>
-            <a:endParaRPr lang="zh-CN" altLang="en-US"/>
-          </a:p>
-        </p:txBody>
-      </p:sp>
-      <p:sp>
-        <p:nvSpPr>
-          <p:cNvPr id="40" name="文本框 39"/>
-          <p:cNvSpPr txBox="1"/>
-          <p:nvPr/>
-        </p:nvSpPr>
-        <p:spPr>
-          <a:xfrm>
-            <a:off x="1798955" y="288925"/>
-            <a:ext cx="407035" cy="368300"/>
-          </a:xfrm>
-          <a:prstGeom prst="rect">
-            <a:avLst/>
-          </a:prstGeom>
-          <a:noFill/>
-        </p:spPr>
-        <p:txBody>
-          <a:bodyPr wrap="square" rtlCol="0">
-            <a:spAutoFit/>
-          </a:bodyPr>
-          <a:p>
-            <a:r>
-              <a:rPr lang="en-US" altLang="zh-CN"/>
-              <a:t>X</a:t>
-            </a:r>
-            <a:endParaRPr lang="en-US" altLang="zh-CN"/>
-          </a:p>
-        </p:txBody>
-      </p:sp>
+              <a:prstDash val="dash"/>
+            </a:ln>
+          </p:spPr>
+          <p:style>
+            <a:lnRef idx="2">
+              <a:schemeClr val="accent1">
+                <a:lumMod val="75000"/>
+              </a:schemeClr>
+            </a:lnRef>
+            <a:fillRef idx="1">
+              <a:schemeClr val="accent1"/>
+            </a:fillRef>
+            <a:effectRef idx="0">
+              <a:srgbClr val="FFFFFF"/>
+            </a:effectRef>
+            <a:fontRef idx="minor">
+              <a:schemeClr val="lt1"/>
+            </a:fontRef>
+          </p:style>
+          <p:txBody>
+            <a:bodyPr rtlCol="0" anchor="ctr"/>
+            <a:p>
+              <a:pPr algn="ctr"/>
+              <a:endParaRPr lang="zh-CN" altLang="en-US"/>
+            </a:p>
+          </p:txBody>
+        </p:sp>
+        <p:sp>
+          <p:nvSpPr>
+            <p:cNvPr id="40" name="文本框 39"/>
+            <p:cNvSpPr txBox="1"/>
+            <p:nvPr/>
+          </p:nvSpPr>
+          <p:spPr>
+            <a:xfrm>
+              <a:off x="2833" y="455"/>
+              <a:ext cx="641" cy="682"/>
+            </a:xfrm>
+            <a:prstGeom prst="rect">
+              <a:avLst/>
+            </a:prstGeom>
+            <a:noFill/>
+          </p:spPr>
+          <p:txBody>
+            <a:bodyPr wrap="square" rtlCol="0">
+              <a:spAutoFit/>
+            </a:bodyPr>
+            <a:p>
+              <a:r>
+                <a:rPr lang="en-US" altLang="zh-CN"/>
+                <a:t>X</a:t>
+              </a:r>
+              <a:endParaRPr lang="en-US" altLang="zh-CN"/>
+            </a:p>
+          </p:txBody>
+        </p:sp>
+      </p:grpSp>
     </p:spTree>
     <p:custDataLst>
       <p:tags r:id="rId5"/>
